--- a/public/lessons/year-6-maths/autumn/week-3/revisit-multiplication-by-one-digit/teaching-powerpoint-v1.pptx
+++ b/public/lessons/year-6-maths/autumn/week-3/revisit-multiplication-by-one-digit/teaching-powerpoint-v1.pptx
@@ -2,24 +2,24 @@
 <file path=ppt/presentation.xml><?xml version="1.0" encoding="utf-8"?>
 <p:presentation xmlns:p="http://schemas.openxmlformats.org/presentationml/2006/main">
   <p:sldMasterIdLst>
-    <p:sldMasterId xmlns:r="http://schemas.openxmlformats.org/officeDocument/2006/relationships" id="2147483648" r:id="R5dadc1b584ec4cc4"/>
+    <p:sldMasterId xmlns:r="http://schemas.openxmlformats.org/officeDocument/2006/relationships" id="2147483648" r:id="R4a10f02af46c458a"/>
   </p:sldMasterIdLst>
   <p:notesMasterIdLst>
-    <p:notesMasterId xmlns:r="http://schemas.openxmlformats.org/officeDocument/2006/relationships" r:id="R0239dae524bb4e4b"/>
+    <p:notesMasterId xmlns:r="http://schemas.openxmlformats.org/officeDocument/2006/relationships" r:id="R087ac934c27141ff"/>
   </p:notesMasterIdLst>
   <p:sldIdLst>
-    <p:sldId xmlns:r="http://schemas.openxmlformats.org/officeDocument/2006/relationships" id="256" r:id="Rbca72680ceba4bf7"/>
-    <p:sldId xmlns:r="http://schemas.openxmlformats.org/officeDocument/2006/relationships" id="257" r:id="Rf175c7152f9a425e"/>
-    <p:sldId xmlns:r="http://schemas.openxmlformats.org/officeDocument/2006/relationships" id="258" r:id="R75bfe5a5da504ce9"/>
-    <p:sldId xmlns:r="http://schemas.openxmlformats.org/officeDocument/2006/relationships" id="259" r:id="Ra53ac27c9dd545d0"/>
-    <p:sldId xmlns:r="http://schemas.openxmlformats.org/officeDocument/2006/relationships" id="260" r:id="Rc8b0c7ae52ff45de"/>
-    <p:sldId xmlns:r="http://schemas.openxmlformats.org/officeDocument/2006/relationships" id="261" r:id="R142704f969924983"/>
-    <p:sldId xmlns:r="http://schemas.openxmlformats.org/officeDocument/2006/relationships" id="262" r:id="R35898c439fbb4513"/>
-    <p:sldId xmlns:r="http://schemas.openxmlformats.org/officeDocument/2006/relationships" id="263" r:id="R88d478a6e4f346c3"/>
-    <p:sldId xmlns:r="http://schemas.openxmlformats.org/officeDocument/2006/relationships" id="264" r:id="Rea9d4728db0a45c4"/>
-    <p:sldId xmlns:r="http://schemas.openxmlformats.org/officeDocument/2006/relationships" id="265" r:id="R8cf1b6c1633e47b0"/>
-    <p:sldId xmlns:r="http://schemas.openxmlformats.org/officeDocument/2006/relationships" id="266" r:id="Rfa908d210f0d4e44"/>
-    <p:sldId xmlns:r="http://schemas.openxmlformats.org/officeDocument/2006/relationships" id="267" r:id="R56913f2781c74345"/>
+    <p:sldId xmlns:r="http://schemas.openxmlformats.org/officeDocument/2006/relationships" id="256" r:id="R3bf09829690c4d82"/>
+    <p:sldId xmlns:r="http://schemas.openxmlformats.org/officeDocument/2006/relationships" id="257" r:id="R51bc0917a2484b53"/>
+    <p:sldId xmlns:r="http://schemas.openxmlformats.org/officeDocument/2006/relationships" id="258" r:id="R11d1cb36c7d94dec"/>
+    <p:sldId xmlns:r="http://schemas.openxmlformats.org/officeDocument/2006/relationships" id="259" r:id="Rdedbac5af7e54a25"/>
+    <p:sldId xmlns:r="http://schemas.openxmlformats.org/officeDocument/2006/relationships" id="260" r:id="Ra18409f5a2c94e62"/>
+    <p:sldId xmlns:r="http://schemas.openxmlformats.org/officeDocument/2006/relationships" id="261" r:id="Ra81adb387cff45af"/>
+    <p:sldId xmlns:r="http://schemas.openxmlformats.org/officeDocument/2006/relationships" id="262" r:id="R498f89929be14cd7"/>
+    <p:sldId xmlns:r="http://schemas.openxmlformats.org/officeDocument/2006/relationships" id="263" r:id="Rc2bbcbca1ded496e"/>
+    <p:sldId xmlns:r="http://schemas.openxmlformats.org/officeDocument/2006/relationships" id="264" r:id="Ra4a9d6f945a74455"/>
+    <p:sldId xmlns:r="http://schemas.openxmlformats.org/officeDocument/2006/relationships" id="265" r:id="R45a17e5a428d4e0b"/>
+    <p:sldId xmlns:r="http://schemas.openxmlformats.org/officeDocument/2006/relationships" id="266" r:id="R83be819f114d48e8"/>
+    <p:sldId xmlns:r="http://schemas.openxmlformats.org/officeDocument/2006/relationships" id="267" r:id="R19122277147e4014"/>
   </p:sldIdLst>
   <p:sldSz cx="12192000" cy="6858000"/>
   <p:notesSz cx="6858000" cy="9144000"/>
@@ -873,7 +873,7 @@
           <a:lstStyle xmlns:a="http://schemas.openxmlformats.org/drawingml/2006/main"/>
           <a:p xmlns:a="http://schemas.openxmlformats.org/drawingml/2006/main">
             <a:r>
-              <a:t>I do. Reveal the question, setup and each calculation stage one click at a time. Pupils watch before copying. Model answer: 20,892.</a:t>
+              <a:t>I do. Reveal the question, then reveal each mathematical change one click at a time. Point to the numbers and operation that changed before moving to the next line. Final answer: 20,892.</a:t>
             </a:r>
           </a:p>
         </p:txBody>
@@ -1291,7 +1291,7 @@
   </p:cSld>
   <p:clrMap bg1="lt1" tx1="dk1" bg2="lt2" tx2="dk2" accent1="accent1" accent2="accent2" accent3="accent3" accent4="accent4" accent5="accent5" accent6="accent6" hlink="hlink" folHlink="folHlink"/>
   <p:sldLayoutIdLst>
-    <p:sldLayoutId xmlns:r="http://schemas.openxmlformats.org/officeDocument/2006/relationships" id="2147483649" r:id="R8ebb0146efd74fc5"/>
+    <p:sldLayoutId xmlns:r="http://schemas.openxmlformats.org/officeDocument/2006/relationships" id="2147483649" r:id="R621b78a4e043444c"/>
   </p:sldLayoutIdLst>
   <p:txStyles>
     <p:titleStyle>
@@ -1842,7 +1842,7 @@
           <p:cNvPr id="12" name="">
             <a:extLst xmlns:a="http://schemas.openxmlformats.org/drawingml/2006/main">
               <a:ext uri="{FF2B5EF4-FFF2-40B4-BE49-F238E27FC236}">
-                <a16:creationId xmlns:a16="http://schemas.microsoft.com/office/drawing/2014/main" id="{C0BC34C0-D391-4070-A1A9-D9E0DB0BCDA4}"/>
+                <a16:creationId xmlns:a16="http://schemas.microsoft.com/office/drawing/2014/main" id="{2F948267-980C-4484-9775-2B99895B91C5}"/>
               </a:ext>
             </a:extLst>
           </p:cNvPr>
@@ -1874,7 +1874,7 @@
           <p:cNvPr id="2" name="">
             <a:extLst xmlns:a="http://schemas.openxmlformats.org/drawingml/2006/main">
               <a:ext uri="{FF2B5EF4-FFF2-40B4-BE49-F238E27FC236}">
-                <a16:creationId xmlns:a16="http://schemas.microsoft.com/office/drawing/2014/main" id="{EEB74F5A-782B-4F05-9DBE-4810766B3712}"/>
+                <a16:creationId xmlns:a16="http://schemas.microsoft.com/office/drawing/2014/main" id="{3B8218A7-6F12-40E8-92C6-470650AFED60}"/>
               </a:ext>
             </a:extLst>
           </p:cNvPr>
@@ -1931,7 +1931,7 @@
           <p:cNvPr id="3" name="">
             <a:extLst xmlns:a="http://schemas.openxmlformats.org/drawingml/2006/main">
               <a:ext uri="{FF2B5EF4-FFF2-40B4-BE49-F238E27FC236}">
-                <a16:creationId xmlns:a16="http://schemas.microsoft.com/office/drawing/2014/main" id="{D75F92EC-96EC-468C-8677-AD1A7D188612}"/>
+                <a16:creationId xmlns:a16="http://schemas.microsoft.com/office/drawing/2014/main" id="{FD768267-987B-499E-A899-6FA39E38A0D9}"/>
               </a:ext>
             </a:extLst>
           </p:cNvPr>
@@ -1965,7 +1965,7 @@
           <p:cNvPr id="4" name="">
             <a:extLst xmlns:a="http://schemas.openxmlformats.org/drawingml/2006/main">
               <a:ext uri="{FF2B5EF4-FFF2-40B4-BE49-F238E27FC236}">
-                <a16:creationId xmlns:a16="http://schemas.microsoft.com/office/drawing/2014/main" id="{C6102F11-AE37-4EE3-957F-CDC50C77A085}"/>
+                <a16:creationId xmlns:a16="http://schemas.microsoft.com/office/drawing/2014/main" id="{8EEE8FEA-5CBC-428D-9FB9-40E498CAF893}"/>
               </a:ext>
             </a:extLst>
           </p:cNvPr>
@@ -2022,7 +2022,7 @@
           <p:cNvPr id="5" name="">
             <a:extLst xmlns:a="http://schemas.openxmlformats.org/drawingml/2006/main">
               <a:ext uri="{FF2B5EF4-FFF2-40B4-BE49-F238E27FC236}">
-                <a16:creationId xmlns:a16="http://schemas.microsoft.com/office/drawing/2014/main" id="{E8555DCA-6EB6-4B0C-BDD9-150C4F0E28B4}"/>
+                <a16:creationId xmlns:a16="http://schemas.microsoft.com/office/drawing/2014/main" id="{82E88873-A554-44E7-8E83-17B439CA6BBB}"/>
               </a:ext>
             </a:extLst>
           </p:cNvPr>
@@ -2079,7 +2079,7 @@
           <p:cNvPr id="6" name="">
             <a:extLst xmlns:a="http://schemas.openxmlformats.org/drawingml/2006/main">
               <a:ext uri="{FF2B5EF4-FFF2-40B4-BE49-F238E27FC236}">
-                <a16:creationId xmlns:a16="http://schemas.microsoft.com/office/drawing/2014/main" id="{52221086-FCAA-4834-82A3-6C70380943DA}"/>
+                <a16:creationId xmlns:a16="http://schemas.microsoft.com/office/drawing/2014/main" id="{C1F04CB8-E91C-44D4-A172-1AB032D11D9C}"/>
               </a:ext>
             </a:extLst>
           </p:cNvPr>
@@ -2113,7 +2113,7 @@
           <p:cNvPr id="7" name="">
             <a:extLst xmlns:a="http://schemas.openxmlformats.org/drawingml/2006/main">
               <a:ext uri="{FF2B5EF4-FFF2-40B4-BE49-F238E27FC236}">
-                <a16:creationId xmlns:a16="http://schemas.microsoft.com/office/drawing/2014/main" id="{E0E2BCA3-F100-4441-A28C-DBC64D358F54}"/>
+                <a16:creationId xmlns:a16="http://schemas.microsoft.com/office/drawing/2014/main" id="{C141A60F-B0D7-4510-8CC5-98AC336D1851}"/>
               </a:ext>
             </a:extLst>
           </p:cNvPr>
@@ -2170,7 +2170,7 @@
           <p:cNvPr id="8" name="">
             <a:extLst xmlns:a="http://schemas.openxmlformats.org/drawingml/2006/main">
               <a:ext uri="{FF2B5EF4-FFF2-40B4-BE49-F238E27FC236}">
-                <a16:creationId xmlns:a16="http://schemas.microsoft.com/office/drawing/2014/main" id="{229B552D-D486-42CA-B697-C55E933CE0F0}"/>
+                <a16:creationId xmlns:a16="http://schemas.microsoft.com/office/drawing/2014/main" id="{6407FBB7-7216-46EE-A993-C390E173B350}"/>
               </a:ext>
             </a:extLst>
           </p:cNvPr>
@@ -2227,7 +2227,7 @@
           <p:cNvPr id="9" name="">
             <a:extLst xmlns:a="http://schemas.openxmlformats.org/drawingml/2006/main">
               <a:ext uri="{FF2B5EF4-FFF2-40B4-BE49-F238E27FC236}">
-                <a16:creationId xmlns:a16="http://schemas.microsoft.com/office/drawing/2014/main" id="{EE7C25C9-804C-44E1-9F15-E79F5CB5EA50}"/>
+                <a16:creationId xmlns:a16="http://schemas.microsoft.com/office/drawing/2014/main" id="{4CDF2C8F-2F4F-405A-87F4-487FBEBD62C1}"/>
               </a:ext>
             </a:extLst>
           </p:cNvPr>
@@ -2284,7 +2284,7 @@
           <p:cNvPr id="10" name="">
             <a:extLst xmlns:a="http://schemas.openxmlformats.org/drawingml/2006/main">
               <a:ext uri="{FF2B5EF4-FFF2-40B4-BE49-F238E27FC236}">
-                <a16:creationId xmlns:a16="http://schemas.microsoft.com/office/drawing/2014/main" id="{987F809C-B58A-440A-B65A-8F105EEDFC2E}"/>
+                <a16:creationId xmlns:a16="http://schemas.microsoft.com/office/drawing/2014/main" id="{6CEBFD67-57FB-4494-A679-7D53E5D3A3B4}"/>
               </a:ext>
             </a:extLst>
           </p:cNvPr>
@@ -2341,7 +2341,7 @@
           <p:cNvPr id="11" name="">
             <a:extLst xmlns:a="http://schemas.openxmlformats.org/drawingml/2006/main">
               <a:ext uri="{FF2B5EF4-FFF2-40B4-BE49-F238E27FC236}">
-                <a16:creationId xmlns:a16="http://schemas.microsoft.com/office/drawing/2014/main" id="{019C519B-FFFB-4A2D-8E48-9EB7621B4C6F}"/>
+                <a16:creationId xmlns:a16="http://schemas.microsoft.com/office/drawing/2014/main" id="{7ABFE63B-BCF2-4E39-B812-2C4A68047802}"/>
               </a:ext>
             </a:extLst>
           </p:cNvPr>
@@ -2396,7 +2396,7 @@
     </p:spTree>
     <p:extLst>
       <p:ext uri="{BB962C8B-B14F-4D97-AF65-F5344CB8AC3E}">
-        <p14:creationId xmlns:p14="http://schemas.microsoft.com/office/powerpoint/2010/main" val="1219541498"/>
+        <p14:creationId xmlns:p14="http://schemas.microsoft.com/office/powerpoint/2010/main" val="1135604265"/>
       </p:ext>
     </p:extLst>
   </p:cSld>
@@ -2427,7 +2427,7 @@
           <p:cNvPr id="14" name="">
             <a:extLst xmlns:a="http://schemas.openxmlformats.org/drawingml/2006/main">
               <a:ext uri="{FF2B5EF4-FFF2-40B4-BE49-F238E27FC236}">
-                <a16:creationId xmlns:a16="http://schemas.microsoft.com/office/drawing/2014/main" id="{F408AEB7-3CF2-4493-9164-C831439C598C}"/>
+                <a16:creationId xmlns:a16="http://schemas.microsoft.com/office/drawing/2014/main" id="{08AD8207-04BC-442B-9926-BCC24552B59F}"/>
               </a:ext>
             </a:extLst>
           </p:cNvPr>
@@ -2459,7 +2459,7 @@
           <p:cNvPr id="2" name="">
             <a:extLst xmlns:a="http://schemas.openxmlformats.org/drawingml/2006/main">
               <a:ext uri="{FF2B5EF4-FFF2-40B4-BE49-F238E27FC236}">
-                <a16:creationId xmlns:a16="http://schemas.microsoft.com/office/drawing/2014/main" id="{55FE56DE-0433-4000-9E2D-AB309EE61D7A}"/>
+                <a16:creationId xmlns:a16="http://schemas.microsoft.com/office/drawing/2014/main" id="{703586E8-BFED-4741-81AB-0EF53865A023}"/>
               </a:ext>
             </a:extLst>
           </p:cNvPr>
@@ -2516,7 +2516,7 @@
           <p:cNvPr id="3" name="">
             <a:extLst xmlns:a="http://schemas.openxmlformats.org/drawingml/2006/main">
               <a:ext uri="{FF2B5EF4-FFF2-40B4-BE49-F238E27FC236}">
-                <a16:creationId xmlns:a16="http://schemas.microsoft.com/office/drawing/2014/main" id="{ED5A0E22-F702-42EE-AE95-C91F694C77A7}"/>
+                <a16:creationId xmlns:a16="http://schemas.microsoft.com/office/drawing/2014/main" id="{1EFD1141-8960-4A47-B461-06C15D2FD28F}"/>
               </a:ext>
             </a:extLst>
           </p:cNvPr>
@@ -2548,7 +2548,7 @@
           <p:cNvPr id="4" name="">
             <a:extLst xmlns:a="http://schemas.openxmlformats.org/drawingml/2006/main">
               <a:ext uri="{FF2B5EF4-FFF2-40B4-BE49-F238E27FC236}">
-                <a16:creationId xmlns:a16="http://schemas.microsoft.com/office/drawing/2014/main" id="{E89DA2A5-B83D-4414-A60D-AEBD4C1B85DA}"/>
+                <a16:creationId xmlns:a16="http://schemas.microsoft.com/office/drawing/2014/main" id="{B1ED6EAD-F8F7-4457-A007-37F9E312DB8F}"/>
               </a:ext>
             </a:extLst>
           </p:cNvPr>
@@ -2605,7 +2605,7 @@
           <p:cNvPr id="5" name="">
             <a:extLst xmlns:a="http://schemas.openxmlformats.org/drawingml/2006/main">
               <a:ext uri="{FF2B5EF4-FFF2-40B4-BE49-F238E27FC236}">
-                <a16:creationId xmlns:a16="http://schemas.microsoft.com/office/drawing/2014/main" id="{917C5F6F-42CB-4316-A80D-DDF02165803B}"/>
+                <a16:creationId xmlns:a16="http://schemas.microsoft.com/office/drawing/2014/main" id="{D05D4C9B-4931-4EDE-8389-DBDF530F29CB}"/>
               </a:ext>
             </a:extLst>
           </p:cNvPr>
@@ -2662,7 +2662,7 @@
           <p:cNvPr id="6" name="">
             <a:extLst xmlns:a="http://schemas.openxmlformats.org/drawingml/2006/main">
               <a:ext uri="{FF2B5EF4-FFF2-40B4-BE49-F238E27FC236}">
-                <a16:creationId xmlns:a16="http://schemas.microsoft.com/office/drawing/2014/main" id="{8C661E4B-0F5D-41C2-95A5-A88A17187D84}"/>
+                <a16:creationId xmlns:a16="http://schemas.microsoft.com/office/drawing/2014/main" id="{23887AC4-D5C9-4D94-950A-32A45611533F}"/>
               </a:ext>
             </a:extLst>
           </p:cNvPr>
@@ -2719,7 +2719,7 @@
           <p:cNvPr id="7" name="">
             <a:extLst xmlns:a="http://schemas.openxmlformats.org/drawingml/2006/main">
               <a:ext uri="{FF2B5EF4-FFF2-40B4-BE49-F238E27FC236}">
-                <a16:creationId xmlns:a16="http://schemas.microsoft.com/office/drawing/2014/main" id="{F6880DC8-6CE1-4BA7-A883-76C8F1CF8665}"/>
+                <a16:creationId xmlns:a16="http://schemas.microsoft.com/office/drawing/2014/main" id="{A0262C6D-5F64-48E9-BBCA-11046934F3E5}"/>
               </a:ext>
             </a:extLst>
           </p:cNvPr>
@@ -2751,7 +2751,7 @@
           <p:cNvPr id="8" name="">
             <a:extLst xmlns:a="http://schemas.openxmlformats.org/drawingml/2006/main">
               <a:ext uri="{FF2B5EF4-FFF2-40B4-BE49-F238E27FC236}">
-                <a16:creationId xmlns:a16="http://schemas.microsoft.com/office/drawing/2014/main" id="{E6DB1D35-5146-41C4-B933-55810C90D6D5}"/>
+                <a16:creationId xmlns:a16="http://schemas.microsoft.com/office/drawing/2014/main" id="{FA32FE02-98A0-47E5-92E1-6C6EF6CB7C95}"/>
               </a:ext>
             </a:extLst>
           </p:cNvPr>
@@ -2808,7 +2808,7 @@
           <p:cNvPr id="9" name="">
             <a:extLst xmlns:a="http://schemas.openxmlformats.org/drawingml/2006/main">
               <a:ext uri="{FF2B5EF4-FFF2-40B4-BE49-F238E27FC236}">
-                <a16:creationId xmlns:a16="http://schemas.microsoft.com/office/drawing/2014/main" id="{19933447-FF47-43E3-B95D-7EC390F77DCA}"/>
+                <a16:creationId xmlns:a16="http://schemas.microsoft.com/office/drawing/2014/main" id="{E24DAFD4-4AD1-4E26-9731-1429083FC760}"/>
               </a:ext>
             </a:extLst>
           </p:cNvPr>
@@ -2865,7 +2865,7 @@
           <p:cNvPr id="10" name="">
             <a:extLst xmlns:a="http://schemas.openxmlformats.org/drawingml/2006/main">
               <a:ext uri="{FF2B5EF4-FFF2-40B4-BE49-F238E27FC236}">
-                <a16:creationId xmlns:a16="http://schemas.microsoft.com/office/drawing/2014/main" id="{760B6369-CE95-4A9F-BC8A-93B3A31440B0}"/>
+                <a16:creationId xmlns:a16="http://schemas.microsoft.com/office/drawing/2014/main" id="{9971D8A4-3084-4DC5-9FA0-632C9056D237}"/>
               </a:ext>
             </a:extLst>
           </p:cNvPr>
@@ -2922,7 +2922,7 @@
           <p:cNvPr id="11" name="">
             <a:extLst xmlns:a="http://schemas.openxmlformats.org/drawingml/2006/main">
               <a:ext uri="{FF2B5EF4-FFF2-40B4-BE49-F238E27FC236}">
-                <a16:creationId xmlns:a16="http://schemas.microsoft.com/office/drawing/2014/main" id="{14DC7C84-6341-4723-B7EA-DD9EAE8EF47A}"/>
+                <a16:creationId xmlns:a16="http://schemas.microsoft.com/office/drawing/2014/main" id="{1CD9FDC7-588F-493C-8B5A-B46AC8C73E5A}"/>
               </a:ext>
             </a:extLst>
           </p:cNvPr>
@@ -2979,7 +2979,7 @@
           <p:cNvPr id="12" name="">
             <a:extLst xmlns:a="http://schemas.openxmlformats.org/drawingml/2006/main">
               <a:ext uri="{FF2B5EF4-FFF2-40B4-BE49-F238E27FC236}">
-                <a16:creationId xmlns:a16="http://schemas.microsoft.com/office/drawing/2014/main" id="{60334360-86A7-4B9E-8A09-D2F13D5C7510}"/>
+                <a16:creationId xmlns:a16="http://schemas.microsoft.com/office/drawing/2014/main" id="{0EB861CA-9031-4BE1-A7B4-A6E8C98C99CB}"/>
               </a:ext>
             </a:extLst>
           </p:cNvPr>
@@ -3036,7 +3036,7 @@
           <p:cNvPr id="13" name="">
             <a:extLst xmlns:a="http://schemas.openxmlformats.org/drawingml/2006/main">
               <a:ext uri="{FF2B5EF4-FFF2-40B4-BE49-F238E27FC236}">
-                <a16:creationId xmlns:a16="http://schemas.microsoft.com/office/drawing/2014/main" id="{D1E32AAA-E112-4203-8950-FB867F3DED89}"/>
+                <a16:creationId xmlns:a16="http://schemas.microsoft.com/office/drawing/2014/main" id="{54684147-408D-45DE-A3C3-1EB148F1EBC0}"/>
               </a:ext>
             </a:extLst>
           </p:cNvPr>
@@ -3091,7 +3091,7 @@
     </p:spTree>
     <p:extLst>
       <p:ext uri="{BB962C8B-B14F-4D97-AF65-F5344CB8AC3E}">
-        <p14:creationId xmlns:p14="http://schemas.microsoft.com/office/powerpoint/2010/main" val="1656607637"/>
+        <p14:creationId xmlns:p14="http://schemas.microsoft.com/office/powerpoint/2010/main" val="1861711652"/>
       </p:ext>
     </p:extLst>
   </p:cSld>
@@ -3292,7 +3292,7 @@
           <p:cNvPr id="19" name="">
             <a:extLst xmlns:a="http://schemas.openxmlformats.org/drawingml/2006/main">
               <a:ext uri="{FF2B5EF4-FFF2-40B4-BE49-F238E27FC236}">
-                <a16:creationId xmlns:a16="http://schemas.microsoft.com/office/drawing/2014/main" id="{51CB5773-8D44-48D5-B565-410982B4C12E}"/>
+                <a16:creationId xmlns:a16="http://schemas.microsoft.com/office/drawing/2014/main" id="{1CCF101A-E555-4E88-A810-8E6A134E8BD1}"/>
               </a:ext>
             </a:extLst>
           </p:cNvPr>
@@ -3324,7 +3324,7 @@
           <p:cNvPr id="2" name="">
             <a:extLst xmlns:a="http://schemas.openxmlformats.org/drawingml/2006/main">
               <a:ext uri="{FF2B5EF4-FFF2-40B4-BE49-F238E27FC236}">
-                <a16:creationId xmlns:a16="http://schemas.microsoft.com/office/drawing/2014/main" id="{A0ECDED9-C5B0-451A-A82A-0F288139D418}"/>
+                <a16:creationId xmlns:a16="http://schemas.microsoft.com/office/drawing/2014/main" id="{0D944737-542C-440A-BE1F-79414E3372A7}"/>
               </a:ext>
             </a:extLst>
           </p:cNvPr>
@@ -3381,7 +3381,7 @@
           <p:cNvPr id="3" name="">
             <a:extLst xmlns:a="http://schemas.openxmlformats.org/drawingml/2006/main">
               <a:ext uri="{FF2B5EF4-FFF2-40B4-BE49-F238E27FC236}">
-                <a16:creationId xmlns:a16="http://schemas.microsoft.com/office/drawing/2014/main" id="{1465879A-73B0-4AC8-B8DA-DE4F15B19505}"/>
+                <a16:creationId xmlns:a16="http://schemas.microsoft.com/office/drawing/2014/main" id="{9B9DE853-3D43-4820-B6B2-B00E0A00A136}"/>
               </a:ext>
             </a:extLst>
           </p:cNvPr>
@@ -3413,7 +3413,7 @@
           <p:cNvPr id="4" name="">
             <a:extLst xmlns:a="http://schemas.openxmlformats.org/drawingml/2006/main">
               <a:ext uri="{FF2B5EF4-FFF2-40B4-BE49-F238E27FC236}">
-                <a16:creationId xmlns:a16="http://schemas.microsoft.com/office/drawing/2014/main" id="{AFB87110-0A6F-4FAE-A069-C0964E8BF5B8}"/>
+                <a16:creationId xmlns:a16="http://schemas.microsoft.com/office/drawing/2014/main" id="{260D51E5-C9E5-439C-9759-A6A072FAA746}"/>
               </a:ext>
             </a:extLst>
           </p:cNvPr>
@@ -3470,7 +3470,7 @@
           <p:cNvPr id="5" name="">
             <a:extLst xmlns:a="http://schemas.openxmlformats.org/drawingml/2006/main">
               <a:ext uri="{FF2B5EF4-FFF2-40B4-BE49-F238E27FC236}">
-                <a16:creationId xmlns:a16="http://schemas.microsoft.com/office/drawing/2014/main" id="{6151C4EF-A517-4EC0-BD20-54F00583307C}"/>
+                <a16:creationId xmlns:a16="http://schemas.microsoft.com/office/drawing/2014/main" id="{52E45DA1-428B-456F-A13F-77A3A05F56BA}"/>
               </a:ext>
             </a:extLst>
           </p:cNvPr>
@@ -3527,7 +3527,7 @@
           <p:cNvPr id="6" name="">
             <a:extLst xmlns:a="http://schemas.openxmlformats.org/drawingml/2006/main">
               <a:ext uri="{FF2B5EF4-FFF2-40B4-BE49-F238E27FC236}">
-                <a16:creationId xmlns:a16="http://schemas.microsoft.com/office/drawing/2014/main" id="{0DA30AF5-923F-43B5-9665-6848A2C96E3F}"/>
+                <a16:creationId xmlns:a16="http://schemas.microsoft.com/office/drawing/2014/main" id="{EBA1351B-4724-49BA-8BD9-5F53578F4031}"/>
               </a:ext>
             </a:extLst>
           </p:cNvPr>
@@ -3584,7 +3584,7 @@
           <p:cNvPr id="7" name="">
             <a:extLst xmlns:a="http://schemas.openxmlformats.org/drawingml/2006/main">
               <a:ext uri="{FF2B5EF4-FFF2-40B4-BE49-F238E27FC236}">
-                <a16:creationId xmlns:a16="http://schemas.microsoft.com/office/drawing/2014/main" id="{1256E1D3-F1A0-4D61-B838-47BB403C1531}"/>
+                <a16:creationId xmlns:a16="http://schemas.microsoft.com/office/drawing/2014/main" id="{6EF39FDD-F24D-4EEC-94FB-32D734A08DA6}"/>
               </a:ext>
             </a:extLst>
           </p:cNvPr>
@@ -3616,7 +3616,7 @@
           <p:cNvPr id="8" name="">
             <a:extLst xmlns:a="http://schemas.openxmlformats.org/drawingml/2006/main">
               <a:ext uri="{FF2B5EF4-FFF2-40B4-BE49-F238E27FC236}">
-                <a16:creationId xmlns:a16="http://schemas.microsoft.com/office/drawing/2014/main" id="{A5B1833F-8E59-4085-A531-874EBC97B9B3}"/>
+                <a16:creationId xmlns:a16="http://schemas.microsoft.com/office/drawing/2014/main" id="{0ECA600D-6804-4D70-B3AB-E0AAC3DC47CA}"/>
               </a:ext>
             </a:extLst>
           </p:cNvPr>
@@ -3673,7 +3673,7 @@
           <p:cNvPr id="9" name="">
             <a:extLst xmlns:a="http://schemas.openxmlformats.org/drawingml/2006/main">
               <a:ext uri="{FF2B5EF4-FFF2-40B4-BE49-F238E27FC236}">
-                <a16:creationId xmlns:a16="http://schemas.microsoft.com/office/drawing/2014/main" id="{3441AE6A-763D-4BA3-9DCE-E7CFBCD04652}"/>
+                <a16:creationId xmlns:a16="http://schemas.microsoft.com/office/drawing/2014/main" id="{C4BF3943-1651-41A8-9C7B-57B832CF9D43}"/>
               </a:ext>
             </a:extLst>
           </p:cNvPr>
@@ -3730,7 +3730,7 @@
           <p:cNvPr id="10" name="">
             <a:extLst xmlns:a="http://schemas.openxmlformats.org/drawingml/2006/main">
               <a:ext uri="{FF2B5EF4-FFF2-40B4-BE49-F238E27FC236}">
-                <a16:creationId xmlns:a16="http://schemas.microsoft.com/office/drawing/2014/main" id="{4D329980-5B31-4687-B3C7-7BDA0384535D}"/>
+                <a16:creationId xmlns:a16="http://schemas.microsoft.com/office/drawing/2014/main" id="{40ABDBE4-5E46-4066-80EF-213C98968E80}"/>
               </a:ext>
             </a:extLst>
           </p:cNvPr>
@@ -3787,7 +3787,7 @@
           <p:cNvPr id="11" name="">
             <a:extLst xmlns:a="http://schemas.openxmlformats.org/drawingml/2006/main">
               <a:ext uri="{FF2B5EF4-FFF2-40B4-BE49-F238E27FC236}">
-                <a16:creationId xmlns:a16="http://schemas.microsoft.com/office/drawing/2014/main" id="{AB56FFD9-1CD2-4CEF-882D-44A2AC7576F8}"/>
+                <a16:creationId xmlns:a16="http://schemas.microsoft.com/office/drawing/2014/main" id="{A7F240DD-5379-4747-8B72-DAFC285A7BDD}"/>
               </a:ext>
             </a:extLst>
           </p:cNvPr>
@@ -3821,7 +3821,7 @@
           <p:cNvPr id="12" name="">
             <a:extLst xmlns:a="http://schemas.openxmlformats.org/drawingml/2006/main">
               <a:ext uri="{FF2B5EF4-FFF2-40B4-BE49-F238E27FC236}">
-                <a16:creationId xmlns:a16="http://schemas.microsoft.com/office/drawing/2014/main" id="{9D783825-B25E-4BCE-AC58-8BA9A44883F6}"/>
+                <a16:creationId xmlns:a16="http://schemas.microsoft.com/office/drawing/2014/main" id="{BD0D4DB0-D378-4B0B-9D2B-F408A521A1B8}"/>
               </a:ext>
             </a:extLst>
           </p:cNvPr>
@@ -3878,7 +3878,7 @@
           <p:cNvPr id="13" name="">
             <a:extLst xmlns:a="http://schemas.openxmlformats.org/drawingml/2006/main">
               <a:ext uri="{FF2B5EF4-FFF2-40B4-BE49-F238E27FC236}">
-                <a16:creationId xmlns:a16="http://schemas.microsoft.com/office/drawing/2014/main" id="{FDF8EF3F-05B2-40A6-815C-AE75B1A630F2}"/>
+                <a16:creationId xmlns:a16="http://schemas.microsoft.com/office/drawing/2014/main" id="{23BFD911-9C1F-4D04-824F-2DB46BBA5EF0}"/>
               </a:ext>
             </a:extLst>
           </p:cNvPr>
@@ -3935,7 +3935,7 @@
           <p:cNvPr id="14" name="">
             <a:extLst xmlns:a="http://schemas.openxmlformats.org/drawingml/2006/main">
               <a:ext uri="{FF2B5EF4-FFF2-40B4-BE49-F238E27FC236}">
-                <a16:creationId xmlns:a16="http://schemas.microsoft.com/office/drawing/2014/main" id="{C8EBA021-4D9C-439A-B092-0670BF515E26}"/>
+                <a16:creationId xmlns:a16="http://schemas.microsoft.com/office/drawing/2014/main" id="{C35EA48E-9B7B-46A3-BBF8-034BC50DFCBD}"/>
               </a:ext>
             </a:extLst>
           </p:cNvPr>
@@ -3992,7 +3992,7 @@
           <p:cNvPr id="15" name="">
             <a:extLst xmlns:a="http://schemas.openxmlformats.org/drawingml/2006/main">
               <a:ext uri="{FF2B5EF4-FFF2-40B4-BE49-F238E27FC236}">
-                <a16:creationId xmlns:a16="http://schemas.microsoft.com/office/drawing/2014/main" id="{2C298A31-88AF-4A2C-8D18-F92A23D98E95}"/>
+                <a16:creationId xmlns:a16="http://schemas.microsoft.com/office/drawing/2014/main" id="{C009A5EF-F02F-4FC9-9B16-D2FB3EBB588C}"/>
               </a:ext>
             </a:extLst>
           </p:cNvPr>
@@ -4026,7 +4026,7 @@
           <p:cNvPr id="16" name="">
             <a:extLst xmlns:a="http://schemas.openxmlformats.org/drawingml/2006/main">
               <a:ext uri="{FF2B5EF4-FFF2-40B4-BE49-F238E27FC236}">
-                <a16:creationId xmlns:a16="http://schemas.microsoft.com/office/drawing/2014/main" id="{1F6B2898-F2F0-4860-AA55-8F74D2A0771A}"/>
+                <a16:creationId xmlns:a16="http://schemas.microsoft.com/office/drawing/2014/main" id="{54D4D07C-F2B4-4F03-BD60-3BE4FC34DADC}"/>
               </a:ext>
             </a:extLst>
           </p:cNvPr>
@@ -4083,7 +4083,7 @@
           <p:cNvPr id="17" name="">
             <a:extLst xmlns:a="http://schemas.openxmlformats.org/drawingml/2006/main">
               <a:ext uri="{FF2B5EF4-FFF2-40B4-BE49-F238E27FC236}">
-                <a16:creationId xmlns:a16="http://schemas.microsoft.com/office/drawing/2014/main" id="{B995E4F2-E55A-4F44-85F7-51DF5C646467}"/>
+                <a16:creationId xmlns:a16="http://schemas.microsoft.com/office/drawing/2014/main" id="{E7FF9D18-895A-40D2-8758-39641F06DB64}"/>
               </a:ext>
             </a:extLst>
           </p:cNvPr>
@@ -4140,7 +4140,7 @@
           <p:cNvPr id="18" name="">
             <a:extLst xmlns:a="http://schemas.openxmlformats.org/drawingml/2006/main">
               <a:ext uri="{FF2B5EF4-FFF2-40B4-BE49-F238E27FC236}">
-                <a16:creationId xmlns:a16="http://schemas.microsoft.com/office/drawing/2014/main" id="{95CA8038-A03D-453D-A20D-B2A89874AED3}"/>
+                <a16:creationId xmlns:a16="http://schemas.microsoft.com/office/drawing/2014/main" id="{E9F26BEB-9B03-4548-9BAA-F47FEC735757}"/>
               </a:ext>
             </a:extLst>
           </p:cNvPr>
@@ -4195,7 +4195,7 @@
     </p:spTree>
     <p:extLst>
       <p:ext uri="{BB962C8B-B14F-4D97-AF65-F5344CB8AC3E}">
-        <p14:creationId xmlns:p14="http://schemas.microsoft.com/office/powerpoint/2010/main" val="1722390115"/>
+        <p14:creationId xmlns:p14="http://schemas.microsoft.com/office/powerpoint/2010/main" val="932075159"/>
       </p:ext>
     </p:extLst>
   </p:cSld>
@@ -4350,7 +4350,7 @@
           <p:cNvPr id="23" name="">
             <a:extLst xmlns:a="http://schemas.openxmlformats.org/drawingml/2006/main">
               <a:ext uri="{FF2B5EF4-FFF2-40B4-BE49-F238E27FC236}">
-                <a16:creationId xmlns:a16="http://schemas.microsoft.com/office/drawing/2014/main" id="{FE0821B5-9769-4C49-8EAD-9F8F6F85CE43}"/>
+                <a16:creationId xmlns:a16="http://schemas.microsoft.com/office/drawing/2014/main" id="{94A65C91-0EBD-4583-B6A5-B79DC2554463}"/>
               </a:ext>
             </a:extLst>
           </p:cNvPr>
@@ -4382,7 +4382,7 @@
           <p:cNvPr id="2" name="">
             <a:extLst xmlns:a="http://schemas.openxmlformats.org/drawingml/2006/main">
               <a:ext uri="{FF2B5EF4-FFF2-40B4-BE49-F238E27FC236}">
-                <a16:creationId xmlns:a16="http://schemas.microsoft.com/office/drawing/2014/main" id="{3F4BBED5-A082-4111-B017-29C3D5632D9F}"/>
+                <a16:creationId xmlns:a16="http://schemas.microsoft.com/office/drawing/2014/main" id="{DE0AB12F-FE10-4FEA-98B9-91D741DA1778}"/>
               </a:ext>
             </a:extLst>
           </p:cNvPr>
@@ -4439,7 +4439,7 @@
           <p:cNvPr id="3" name="">
             <a:extLst xmlns:a="http://schemas.openxmlformats.org/drawingml/2006/main">
               <a:ext uri="{FF2B5EF4-FFF2-40B4-BE49-F238E27FC236}">
-                <a16:creationId xmlns:a16="http://schemas.microsoft.com/office/drawing/2014/main" id="{A998278C-2C11-44B8-BF01-7BD3C9A7DB89}"/>
+                <a16:creationId xmlns:a16="http://schemas.microsoft.com/office/drawing/2014/main" id="{9F5B60DF-90C6-4E0D-A9BA-EC87198DCF12}"/>
               </a:ext>
             </a:extLst>
           </p:cNvPr>
@@ -4471,7 +4471,7 @@
           <p:cNvPr id="4" name="">
             <a:extLst xmlns:a="http://schemas.openxmlformats.org/drawingml/2006/main">
               <a:ext uri="{FF2B5EF4-FFF2-40B4-BE49-F238E27FC236}">
-                <a16:creationId xmlns:a16="http://schemas.microsoft.com/office/drawing/2014/main" id="{457E2147-DD2D-4B8E-B985-C81E198E0CD4}"/>
+                <a16:creationId xmlns:a16="http://schemas.microsoft.com/office/drawing/2014/main" id="{2357ACBE-B004-4FBB-8809-0298B35BA2CB}"/>
               </a:ext>
             </a:extLst>
           </p:cNvPr>
@@ -4528,7 +4528,7 @@
           <p:cNvPr id="5" name="">
             <a:extLst xmlns:a="http://schemas.openxmlformats.org/drawingml/2006/main">
               <a:ext uri="{FF2B5EF4-FFF2-40B4-BE49-F238E27FC236}">
-                <a16:creationId xmlns:a16="http://schemas.microsoft.com/office/drawing/2014/main" id="{9459BECA-8161-4F69-8D19-59FFE42B99E3}"/>
+                <a16:creationId xmlns:a16="http://schemas.microsoft.com/office/drawing/2014/main" id="{4E0DD03C-DEEC-4673-8BCD-5AF0E29234B3}"/>
               </a:ext>
             </a:extLst>
           </p:cNvPr>
@@ -4585,7 +4585,7 @@
           <p:cNvPr id="6" name="">
             <a:extLst xmlns:a="http://schemas.openxmlformats.org/drawingml/2006/main">
               <a:ext uri="{FF2B5EF4-FFF2-40B4-BE49-F238E27FC236}">
-                <a16:creationId xmlns:a16="http://schemas.microsoft.com/office/drawing/2014/main" id="{8357044F-AB32-44AA-831A-5249F11CB649}"/>
+                <a16:creationId xmlns:a16="http://schemas.microsoft.com/office/drawing/2014/main" id="{24BC053E-D51A-45F1-9D63-441A7212963B}"/>
               </a:ext>
             </a:extLst>
           </p:cNvPr>
@@ -4642,7 +4642,7 @@
           <p:cNvPr id="7" name="">
             <a:extLst xmlns:a="http://schemas.openxmlformats.org/drawingml/2006/main">
               <a:ext uri="{FF2B5EF4-FFF2-40B4-BE49-F238E27FC236}">
-                <a16:creationId xmlns:a16="http://schemas.microsoft.com/office/drawing/2014/main" id="{BAFA407E-3B2A-499A-894B-CA64E98CC409}"/>
+                <a16:creationId xmlns:a16="http://schemas.microsoft.com/office/drawing/2014/main" id="{E383AE7D-F275-4964-A70F-BBF84F53FE3B}"/>
               </a:ext>
             </a:extLst>
           </p:cNvPr>
@@ -4674,7 +4674,7 @@
           <p:cNvPr id="8" name="">
             <a:extLst xmlns:a="http://schemas.openxmlformats.org/drawingml/2006/main">
               <a:ext uri="{FF2B5EF4-FFF2-40B4-BE49-F238E27FC236}">
-                <a16:creationId xmlns:a16="http://schemas.microsoft.com/office/drawing/2014/main" id="{E251D394-C1D9-41C6-9009-72CB55ED5D72}"/>
+                <a16:creationId xmlns:a16="http://schemas.microsoft.com/office/drawing/2014/main" id="{00B5BC03-D198-4B65-9811-09F74DBB1381}"/>
               </a:ext>
             </a:extLst>
           </p:cNvPr>
@@ -4731,7 +4731,7 @@
           <p:cNvPr id="9" name="">
             <a:extLst xmlns:a="http://schemas.openxmlformats.org/drawingml/2006/main">
               <a:ext uri="{FF2B5EF4-FFF2-40B4-BE49-F238E27FC236}">
-                <a16:creationId xmlns:a16="http://schemas.microsoft.com/office/drawing/2014/main" id="{25260E0E-26EC-48D3-A12B-3DB470E7B943}"/>
+                <a16:creationId xmlns:a16="http://schemas.microsoft.com/office/drawing/2014/main" id="{BB60F7B4-A4F4-4A22-93F3-CFA3BDA3EECA}"/>
               </a:ext>
             </a:extLst>
           </p:cNvPr>
@@ -4788,7 +4788,7 @@
           <p:cNvPr id="10" name="">
             <a:extLst xmlns:a="http://schemas.openxmlformats.org/drawingml/2006/main">
               <a:ext uri="{FF2B5EF4-FFF2-40B4-BE49-F238E27FC236}">
-                <a16:creationId xmlns:a16="http://schemas.microsoft.com/office/drawing/2014/main" id="{0D00F9BB-3B3C-4739-B600-7827428D4DF8}"/>
+                <a16:creationId xmlns:a16="http://schemas.microsoft.com/office/drawing/2014/main" id="{467F3015-DE67-4FE8-9892-B90BDE5048B3}"/>
               </a:ext>
             </a:extLst>
           </p:cNvPr>
@@ -4822,7 +4822,7 @@
           <p:cNvPr id="11" name="">
             <a:extLst xmlns:a="http://schemas.openxmlformats.org/drawingml/2006/main">
               <a:ext uri="{FF2B5EF4-FFF2-40B4-BE49-F238E27FC236}">
-                <a16:creationId xmlns:a16="http://schemas.microsoft.com/office/drawing/2014/main" id="{FC38F4B5-5CCE-4FBD-97FE-1757DEAC0CD2}"/>
+                <a16:creationId xmlns:a16="http://schemas.microsoft.com/office/drawing/2014/main" id="{F32E7E87-29ED-468C-8677-D09A84E8D089}"/>
               </a:ext>
             </a:extLst>
           </p:cNvPr>
@@ -4854,7 +4854,7 @@
           <p:cNvPr id="12" name="">
             <a:extLst xmlns:a="http://schemas.openxmlformats.org/drawingml/2006/main">
               <a:ext uri="{FF2B5EF4-FFF2-40B4-BE49-F238E27FC236}">
-                <a16:creationId xmlns:a16="http://schemas.microsoft.com/office/drawing/2014/main" id="{0832C550-8905-4001-831A-9E35AA91BA56}"/>
+                <a16:creationId xmlns:a16="http://schemas.microsoft.com/office/drawing/2014/main" id="{B6AE94BB-CD44-465B-9CC7-A85EB754904A}"/>
               </a:ext>
             </a:extLst>
           </p:cNvPr>
@@ -4911,7 +4911,7 @@
           <p:cNvPr id="13" name="">
             <a:extLst xmlns:a="http://schemas.openxmlformats.org/drawingml/2006/main">
               <a:ext uri="{FF2B5EF4-FFF2-40B4-BE49-F238E27FC236}">
-                <a16:creationId xmlns:a16="http://schemas.microsoft.com/office/drawing/2014/main" id="{5BCEA43F-520A-42EF-8168-940E8ABA917B}"/>
+                <a16:creationId xmlns:a16="http://schemas.microsoft.com/office/drawing/2014/main" id="{F1CC251D-9DBD-42E7-9555-5630E2DAC944}"/>
               </a:ext>
             </a:extLst>
           </p:cNvPr>
@@ -4968,7 +4968,7 @@
           <p:cNvPr id="14" name="">
             <a:extLst xmlns:a="http://schemas.openxmlformats.org/drawingml/2006/main">
               <a:ext uri="{FF2B5EF4-FFF2-40B4-BE49-F238E27FC236}">
-                <a16:creationId xmlns:a16="http://schemas.microsoft.com/office/drawing/2014/main" id="{3FDA5D02-AD48-41AE-BF9F-4907D15AB1C5}"/>
+                <a16:creationId xmlns:a16="http://schemas.microsoft.com/office/drawing/2014/main" id="{11B62459-473E-421E-A264-E70BF4591A82}"/>
               </a:ext>
             </a:extLst>
           </p:cNvPr>
@@ -5002,7 +5002,7 @@
           <p:cNvPr id="15" name="">
             <a:extLst xmlns:a="http://schemas.openxmlformats.org/drawingml/2006/main">
               <a:ext uri="{FF2B5EF4-FFF2-40B4-BE49-F238E27FC236}">
-                <a16:creationId xmlns:a16="http://schemas.microsoft.com/office/drawing/2014/main" id="{BF7D5030-904C-4F6B-9454-55F2E8AA77B7}"/>
+                <a16:creationId xmlns:a16="http://schemas.microsoft.com/office/drawing/2014/main" id="{FB5E1930-4A14-40FE-B4DA-CA413F0B285D}"/>
               </a:ext>
             </a:extLst>
           </p:cNvPr>
@@ -5034,7 +5034,7 @@
           <p:cNvPr id="16" name="">
             <a:extLst xmlns:a="http://schemas.openxmlformats.org/drawingml/2006/main">
               <a:ext uri="{FF2B5EF4-FFF2-40B4-BE49-F238E27FC236}">
-                <a16:creationId xmlns:a16="http://schemas.microsoft.com/office/drawing/2014/main" id="{737A2DEA-BD6F-4EB2-9D51-ACB026184C54}"/>
+                <a16:creationId xmlns:a16="http://schemas.microsoft.com/office/drawing/2014/main" id="{3D3A866B-92A3-40CD-8E48-3666648F92DB}"/>
               </a:ext>
             </a:extLst>
           </p:cNvPr>
@@ -5091,7 +5091,7 @@
           <p:cNvPr id="17" name="">
             <a:extLst xmlns:a="http://schemas.openxmlformats.org/drawingml/2006/main">
               <a:ext uri="{FF2B5EF4-FFF2-40B4-BE49-F238E27FC236}">
-                <a16:creationId xmlns:a16="http://schemas.microsoft.com/office/drawing/2014/main" id="{630A12F3-3582-4ECD-8E30-F99A75D50178}"/>
+                <a16:creationId xmlns:a16="http://schemas.microsoft.com/office/drawing/2014/main" id="{34882B93-B0F8-427B-8B21-2B81F0B0D214}"/>
               </a:ext>
             </a:extLst>
           </p:cNvPr>
@@ -5148,7 +5148,7 @@
           <p:cNvPr id="18" name="">
             <a:extLst xmlns:a="http://schemas.openxmlformats.org/drawingml/2006/main">
               <a:ext uri="{FF2B5EF4-FFF2-40B4-BE49-F238E27FC236}">
-                <a16:creationId xmlns:a16="http://schemas.microsoft.com/office/drawing/2014/main" id="{99C430DD-DAE2-4D9D-BC59-43C634988297}"/>
+                <a16:creationId xmlns:a16="http://schemas.microsoft.com/office/drawing/2014/main" id="{36C55392-9801-4F0A-B0DE-B2AF3C1154AD}"/>
               </a:ext>
             </a:extLst>
           </p:cNvPr>
@@ -5182,7 +5182,7 @@
           <p:cNvPr id="19" name="">
             <a:extLst xmlns:a="http://schemas.openxmlformats.org/drawingml/2006/main">
               <a:ext uri="{FF2B5EF4-FFF2-40B4-BE49-F238E27FC236}">
-                <a16:creationId xmlns:a16="http://schemas.microsoft.com/office/drawing/2014/main" id="{4E8638F4-CB9F-4F8C-A7F1-3725DA585AD6}"/>
+                <a16:creationId xmlns:a16="http://schemas.microsoft.com/office/drawing/2014/main" id="{5DCFFB27-EDB7-427E-B2FC-2E967DD0EC30}"/>
               </a:ext>
             </a:extLst>
           </p:cNvPr>
@@ -5214,7 +5214,7 @@
           <p:cNvPr id="20" name="">
             <a:extLst xmlns:a="http://schemas.openxmlformats.org/drawingml/2006/main">
               <a:ext uri="{FF2B5EF4-FFF2-40B4-BE49-F238E27FC236}">
-                <a16:creationId xmlns:a16="http://schemas.microsoft.com/office/drawing/2014/main" id="{A29FD546-54F6-425C-8928-E91C00B00501}"/>
+                <a16:creationId xmlns:a16="http://schemas.microsoft.com/office/drawing/2014/main" id="{43CF4EB9-A110-44DA-9423-A5447DF666B0}"/>
               </a:ext>
             </a:extLst>
           </p:cNvPr>
@@ -5271,7 +5271,7 @@
           <p:cNvPr id="21" name="">
             <a:extLst xmlns:a="http://schemas.openxmlformats.org/drawingml/2006/main">
               <a:ext uri="{FF2B5EF4-FFF2-40B4-BE49-F238E27FC236}">
-                <a16:creationId xmlns:a16="http://schemas.microsoft.com/office/drawing/2014/main" id="{BBA77E8B-EC69-486F-BF8B-77C47ABA062C}"/>
+                <a16:creationId xmlns:a16="http://schemas.microsoft.com/office/drawing/2014/main" id="{96A3F23D-5179-43CE-97F1-210E810C8B65}"/>
               </a:ext>
             </a:extLst>
           </p:cNvPr>
@@ -5328,7 +5328,7 @@
           <p:cNvPr id="22" name="">
             <a:extLst xmlns:a="http://schemas.openxmlformats.org/drawingml/2006/main">
               <a:ext uri="{FF2B5EF4-FFF2-40B4-BE49-F238E27FC236}">
-                <a16:creationId xmlns:a16="http://schemas.microsoft.com/office/drawing/2014/main" id="{A749D616-41D7-4B96-9B6B-7B669AE66836}"/>
+                <a16:creationId xmlns:a16="http://schemas.microsoft.com/office/drawing/2014/main" id="{342348F5-6018-4A64-9522-5AB0E6137E31}"/>
               </a:ext>
             </a:extLst>
           </p:cNvPr>
@@ -5383,7 +5383,7 @@
     </p:spTree>
     <p:extLst>
       <p:ext uri="{BB962C8B-B14F-4D97-AF65-F5344CB8AC3E}">
-        <p14:creationId xmlns:p14="http://schemas.microsoft.com/office/powerpoint/2010/main" val="747853392"/>
+        <p14:creationId xmlns:p14="http://schemas.microsoft.com/office/powerpoint/2010/main" val="843922390"/>
       </p:ext>
     </p:extLst>
   </p:cSld>
@@ -5584,7 +5584,7 @@
           <p:cNvPr id="23" name="">
             <a:extLst xmlns:a="http://schemas.openxmlformats.org/drawingml/2006/main">
               <a:ext uri="{FF2B5EF4-FFF2-40B4-BE49-F238E27FC236}">
-                <a16:creationId xmlns:a16="http://schemas.microsoft.com/office/drawing/2014/main" id="{ED1BCB0B-B606-43DF-890C-FE4358734B67}"/>
+                <a16:creationId xmlns:a16="http://schemas.microsoft.com/office/drawing/2014/main" id="{A9CC3F0E-2937-4EB2-83EF-B91A0C2181D9}"/>
               </a:ext>
             </a:extLst>
           </p:cNvPr>
@@ -5616,7 +5616,7 @@
           <p:cNvPr id="2" name="">
             <a:extLst xmlns:a="http://schemas.openxmlformats.org/drawingml/2006/main">
               <a:ext uri="{FF2B5EF4-FFF2-40B4-BE49-F238E27FC236}">
-                <a16:creationId xmlns:a16="http://schemas.microsoft.com/office/drawing/2014/main" id="{0EEC9096-EC0D-4397-BEF2-00C5C1334F5F}"/>
+                <a16:creationId xmlns:a16="http://schemas.microsoft.com/office/drawing/2014/main" id="{E1456853-F650-4CF7-A193-EB7DF83FAD3D}"/>
               </a:ext>
             </a:extLst>
           </p:cNvPr>
@@ -5673,7 +5673,7 @@
           <p:cNvPr id="3" name="">
             <a:extLst xmlns:a="http://schemas.openxmlformats.org/drawingml/2006/main">
               <a:ext uri="{FF2B5EF4-FFF2-40B4-BE49-F238E27FC236}">
-                <a16:creationId xmlns:a16="http://schemas.microsoft.com/office/drawing/2014/main" id="{5B594626-A566-466F-BF98-C1F1A3840339}"/>
+                <a16:creationId xmlns:a16="http://schemas.microsoft.com/office/drawing/2014/main" id="{9972782A-AB66-43C2-8C19-EA7CA653794D}"/>
               </a:ext>
             </a:extLst>
           </p:cNvPr>
@@ -5705,7 +5705,7 @@
           <p:cNvPr id="4" name="">
             <a:extLst xmlns:a="http://schemas.openxmlformats.org/drawingml/2006/main">
               <a:ext uri="{FF2B5EF4-FFF2-40B4-BE49-F238E27FC236}">
-                <a16:creationId xmlns:a16="http://schemas.microsoft.com/office/drawing/2014/main" id="{649840EA-A942-4D00-87B4-AA8B23228C74}"/>
+                <a16:creationId xmlns:a16="http://schemas.microsoft.com/office/drawing/2014/main" id="{7436BF54-5D06-4AC1-BD27-AB377612CB1A}"/>
               </a:ext>
             </a:extLst>
           </p:cNvPr>
@@ -5762,7 +5762,7 @@
           <p:cNvPr id="5" name="">
             <a:extLst xmlns:a="http://schemas.openxmlformats.org/drawingml/2006/main">
               <a:ext uri="{FF2B5EF4-FFF2-40B4-BE49-F238E27FC236}">
-                <a16:creationId xmlns:a16="http://schemas.microsoft.com/office/drawing/2014/main" id="{C33C0425-CB89-4413-87F9-036830107966}"/>
+                <a16:creationId xmlns:a16="http://schemas.microsoft.com/office/drawing/2014/main" id="{CF954043-13E9-4FDC-A72F-DABC77982429}"/>
               </a:ext>
             </a:extLst>
           </p:cNvPr>
@@ -5819,7 +5819,7 @@
           <p:cNvPr id="6" name="">
             <a:extLst xmlns:a="http://schemas.openxmlformats.org/drawingml/2006/main">
               <a:ext uri="{FF2B5EF4-FFF2-40B4-BE49-F238E27FC236}">
-                <a16:creationId xmlns:a16="http://schemas.microsoft.com/office/drawing/2014/main" id="{31B3A720-6F62-42E6-975D-EA0FEA6D68A0}"/>
+                <a16:creationId xmlns:a16="http://schemas.microsoft.com/office/drawing/2014/main" id="{65A71A1C-76B3-492A-B716-3E67BEF169CD}"/>
               </a:ext>
             </a:extLst>
           </p:cNvPr>
@@ -5876,7 +5876,7 @@
           <p:cNvPr id="7" name="">
             <a:extLst xmlns:a="http://schemas.openxmlformats.org/drawingml/2006/main">
               <a:ext uri="{FF2B5EF4-FFF2-40B4-BE49-F238E27FC236}">
-                <a16:creationId xmlns:a16="http://schemas.microsoft.com/office/drawing/2014/main" id="{5284AF99-2389-4897-9D1B-1BED74D048C7}"/>
+                <a16:creationId xmlns:a16="http://schemas.microsoft.com/office/drawing/2014/main" id="{B8DB61F6-1E3F-4E38-A78A-86A5DC424F30}"/>
               </a:ext>
             </a:extLst>
           </p:cNvPr>
@@ -5908,7 +5908,7 @@
           <p:cNvPr id="8" name="">
             <a:extLst xmlns:a="http://schemas.openxmlformats.org/drawingml/2006/main">
               <a:ext uri="{FF2B5EF4-FFF2-40B4-BE49-F238E27FC236}">
-                <a16:creationId xmlns:a16="http://schemas.microsoft.com/office/drawing/2014/main" id="{A6B7A8BD-E088-4A80-B4DE-9B4E365B9839}"/>
+                <a16:creationId xmlns:a16="http://schemas.microsoft.com/office/drawing/2014/main" id="{9211F23A-14C3-4744-964C-AF33EFD2C9EB}"/>
               </a:ext>
             </a:extLst>
           </p:cNvPr>
@@ -5965,7 +5965,7 @@
           <p:cNvPr id="9" name="">
             <a:extLst xmlns:a="http://schemas.openxmlformats.org/drawingml/2006/main">
               <a:ext uri="{FF2B5EF4-FFF2-40B4-BE49-F238E27FC236}">
-                <a16:creationId xmlns:a16="http://schemas.microsoft.com/office/drawing/2014/main" id="{DFE45535-D2B5-4CC3-98ED-FBB4110AAB27}"/>
+                <a16:creationId xmlns:a16="http://schemas.microsoft.com/office/drawing/2014/main" id="{D7846332-8AFC-408C-A986-C7EF3E04CFB0}"/>
               </a:ext>
             </a:extLst>
           </p:cNvPr>
@@ -6022,7 +6022,7 @@
           <p:cNvPr id="10" name="">
             <a:extLst xmlns:a="http://schemas.openxmlformats.org/drawingml/2006/main">
               <a:ext uri="{FF2B5EF4-FFF2-40B4-BE49-F238E27FC236}">
-                <a16:creationId xmlns:a16="http://schemas.microsoft.com/office/drawing/2014/main" id="{8B356819-B70F-45D4-99F9-CB339C3FACA8}"/>
+                <a16:creationId xmlns:a16="http://schemas.microsoft.com/office/drawing/2014/main" id="{1DC16D8A-9C8E-4BA8-A9F5-EC8B47AE34AD}"/>
               </a:ext>
             </a:extLst>
           </p:cNvPr>
@@ -6056,7 +6056,7 @@
           <p:cNvPr id="11" name="">
             <a:extLst xmlns:a="http://schemas.openxmlformats.org/drawingml/2006/main">
               <a:ext uri="{FF2B5EF4-FFF2-40B4-BE49-F238E27FC236}">
-                <a16:creationId xmlns:a16="http://schemas.microsoft.com/office/drawing/2014/main" id="{0B753293-E4AC-4A82-92F4-4BDE606A7F10}"/>
+                <a16:creationId xmlns:a16="http://schemas.microsoft.com/office/drawing/2014/main" id="{708C464F-17C6-4F24-8295-3F7C2374EC6A}"/>
               </a:ext>
             </a:extLst>
           </p:cNvPr>
@@ -6088,7 +6088,7 @@
           <p:cNvPr id="12" name="">
             <a:extLst xmlns:a="http://schemas.openxmlformats.org/drawingml/2006/main">
               <a:ext uri="{FF2B5EF4-FFF2-40B4-BE49-F238E27FC236}">
-                <a16:creationId xmlns:a16="http://schemas.microsoft.com/office/drawing/2014/main" id="{1AE72338-62D8-4C7F-81D9-171F104782B3}"/>
+                <a16:creationId xmlns:a16="http://schemas.microsoft.com/office/drawing/2014/main" id="{DBE1DB87-BE6E-4F49-AA09-481DA171E9B2}"/>
               </a:ext>
             </a:extLst>
           </p:cNvPr>
@@ -6145,7 +6145,7 @@
           <p:cNvPr id="13" name="">
             <a:extLst xmlns:a="http://schemas.openxmlformats.org/drawingml/2006/main">
               <a:ext uri="{FF2B5EF4-FFF2-40B4-BE49-F238E27FC236}">
-                <a16:creationId xmlns:a16="http://schemas.microsoft.com/office/drawing/2014/main" id="{60D37F42-CAD1-4DD8-8411-3AA65905CECF}"/>
+                <a16:creationId xmlns:a16="http://schemas.microsoft.com/office/drawing/2014/main" id="{70F72079-EC13-4BB4-8384-5653BC49BD3D}"/>
               </a:ext>
             </a:extLst>
           </p:cNvPr>
@@ -6202,7 +6202,7 @@
           <p:cNvPr id="14" name="">
             <a:extLst xmlns:a="http://schemas.openxmlformats.org/drawingml/2006/main">
               <a:ext uri="{FF2B5EF4-FFF2-40B4-BE49-F238E27FC236}">
-                <a16:creationId xmlns:a16="http://schemas.microsoft.com/office/drawing/2014/main" id="{C8372A3A-D177-41EB-8944-EE94510B15BB}"/>
+                <a16:creationId xmlns:a16="http://schemas.microsoft.com/office/drawing/2014/main" id="{7B3D7E09-44FF-4B88-9932-8CF86E7E9422}"/>
               </a:ext>
             </a:extLst>
           </p:cNvPr>
@@ -6236,7 +6236,7 @@
           <p:cNvPr id="15" name="">
             <a:extLst xmlns:a="http://schemas.openxmlformats.org/drawingml/2006/main">
               <a:ext uri="{FF2B5EF4-FFF2-40B4-BE49-F238E27FC236}">
-                <a16:creationId xmlns:a16="http://schemas.microsoft.com/office/drawing/2014/main" id="{2DD83D22-F3FE-48E0-BC74-79D332C1816E}"/>
+                <a16:creationId xmlns:a16="http://schemas.microsoft.com/office/drawing/2014/main" id="{E8C94492-A81D-414E-9167-056AFCE7EF15}"/>
               </a:ext>
             </a:extLst>
           </p:cNvPr>
@@ -6268,7 +6268,7 @@
           <p:cNvPr id="16" name="">
             <a:extLst xmlns:a="http://schemas.openxmlformats.org/drawingml/2006/main">
               <a:ext uri="{FF2B5EF4-FFF2-40B4-BE49-F238E27FC236}">
-                <a16:creationId xmlns:a16="http://schemas.microsoft.com/office/drawing/2014/main" id="{50E7BBE0-1F34-48F5-8A30-1BEC3930D588}"/>
+                <a16:creationId xmlns:a16="http://schemas.microsoft.com/office/drawing/2014/main" id="{94B24016-14B0-4B3D-B528-465C20C3C257}"/>
               </a:ext>
             </a:extLst>
           </p:cNvPr>
@@ -6325,7 +6325,7 @@
           <p:cNvPr id="17" name="">
             <a:extLst xmlns:a="http://schemas.openxmlformats.org/drawingml/2006/main">
               <a:ext uri="{FF2B5EF4-FFF2-40B4-BE49-F238E27FC236}">
-                <a16:creationId xmlns:a16="http://schemas.microsoft.com/office/drawing/2014/main" id="{80C7FF14-CDC3-4796-848A-C60790662DD3}"/>
+                <a16:creationId xmlns:a16="http://schemas.microsoft.com/office/drawing/2014/main" id="{EEA53917-E4EA-404F-8F1B-8C5272407E99}"/>
               </a:ext>
             </a:extLst>
           </p:cNvPr>
@@ -6382,7 +6382,7 @@
           <p:cNvPr id="18" name="">
             <a:extLst xmlns:a="http://schemas.openxmlformats.org/drawingml/2006/main">
               <a:ext uri="{FF2B5EF4-FFF2-40B4-BE49-F238E27FC236}">
-                <a16:creationId xmlns:a16="http://schemas.microsoft.com/office/drawing/2014/main" id="{8ACBA3A6-DB5D-462E-BC6F-B8D20A0A8080}"/>
+                <a16:creationId xmlns:a16="http://schemas.microsoft.com/office/drawing/2014/main" id="{E835C369-E6A0-46A8-8919-0847D5B2B1D6}"/>
               </a:ext>
             </a:extLst>
           </p:cNvPr>
@@ -6416,7 +6416,7 @@
           <p:cNvPr id="19" name="">
             <a:extLst xmlns:a="http://schemas.openxmlformats.org/drawingml/2006/main">
               <a:ext uri="{FF2B5EF4-FFF2-40B4-BE49-F238E27FC236}">
-                <a16:creationId xmlns:a16="http://schemas.microsoft.com/office/drawing/2014/main" id="{22D6B152-3E04-4455-8094-791059C2AE90}"/>
+                <a16:creationId xmlns:a16="http://schemas.microsoft.com/office/drawing/2014/main" id="{8BC02361-2652-4A17-9941-4EDD6B125C8E}"/>
               </a:ext>
             </a:extLst>
           </p:cNvPr>
@@ -6448,7 +6448,7 @@
           <p:cNvPr id="20" name="">
             <a:extLst xmlns:a="http://schemas.openxmlformats.org/drawingml/2006/main">
               <a:ext uri="{FF2B5EF4-FFF2-40B4-BE49-F238E27FC236}">
-                <a16:creationId xmlns:a16="http://schemas.microsoft.com/office/drawing/2014/main" id="{FB13AE30-C915-4B7F-8C44-EB270DCE7E12}"/>
+                <a16:creationId xmlns:a16="http://schemas.microsoft.com/office/drawing/2014/main" id="{846C0C95-D966-49B5-B928-67D8E5F03ED4}"/>
               </a:ext>
             </a:extLst>
           </p:cNvPr>
@@ -6505,7 +6505,7 @@
           <p:cNvPr id="21" name="">
             <a:extLst xmlns:a="http://schemas.openxmlformats.org/drawingml/2006/main">
               <a:ext uri="{FF2B5EF4-FFF2-40B4-BE49-F238E27FC236}">
-                <a16:creationId xmlns:a16="http://schemas.microsoft.com/office/drawing/2014/main" id="{FC237174-FCBB-4D24-96C4-100BF413015A}"/>
+                <a16:creationId xmlns:a16="http://schemas.microsoft.com/office/drawing/2014/main" id="{518F6C50-1611-4780-9E1E-08AB86241E48}"/>
               </a:ext>
             </a:extLst>
           </p:cNvPr>
@@ -6562,7 +6562,7 @@
           <p:cNvPr id="22" name="">
             <a:extLst xmlns:a="http://schemas.openxmlformats.org/drawingml/2006/main">
               <a:ext uri="{FF2B5EF4-FFF2-40B4-BE49-F238E27FC236}">
-                <a16:creationId xmlns:a16="http://schemas.microsoft.com/office/drawing/2014/main" id="{D312F287-D99E-441F-804B-A25EAE35E44E}"/>
+                <a16:creationId xmlns:a16="http://schemas.microsoft.com/office/drawing/2014/main" id="{F0F37AAC-2EF9-4D8D-8591-E7CEB429DA24}"/>
               </a:ext>
             </a:extLst>
           </p:cNvPr>
@@ -6617,7 +6617,7 @@
     </p:spTree>
     <p:extLst>
       <p:ext uri="{BB962C8B-B14F-4D97-AF65-F5344CB8AC3E}">
-        <p14:creationId xmlns:p14="http://schemas.microsoft.com/office/powerpoint/2010/main" val="1602529008"/>
+        <p14:creationId xmlns:p14="http://schemas.microsoft.com/office/powerpoint/2010/main" val="275073701"/>
       </p:ext>
     </p:extLst>
   </p:cSld>
@@ -6818,7 +6818,7 @@
           <p:cNvPr id="16" name="">
             <a:extLst xmlns:a="http://schemas.openxmlformats.org/drawingml/2006/main">
               <a:ext uri="{FF2B5EF4-FFF2-40B4-BE49-F238E27FC236}">
-                <a16:creationId xmlns:a16="http://schemas.microsoft.com/office/drawing/2014/main" id="{A9375880-258D-457C-942D-1CAAEBF38A59}"/>
+                <a16:creationId xmlns:a16="http://schemas.microsoft.com/office/drawing/2014/main" id="{1AF8832C-A4CC-4C5E-9DFF-5154AE5FA8EC}"/>
               </a:ext>
             </a:extLst>
           </p:cNvPr>
@@ -6850,7 +6850,7 @@
           <p:cNvPr id="2" name="">
             <a:extLst xmlns:a="http://schemas.openxmlformats.org/drawingml/2006/main">
               <a:ext uri="{FF2B5EF4-FFF2-40B4-BE49-F238E27FC236}">
-                <a16:creationId xmlns:a16="http://schemas.microsoft.com/office/drawing/2014/main" id="{94779EAD-92A2-44AE-975D-6B312010271B}"/>
+                <a16:creationId xmlns:a16="http://schemas.microsoft.com/office/drawing/2014/main" id="{18CFE394-F0A2-434E-8152-8A0506B22E3C}"/>
               </a:ext>
             </a:extLst>
           </p:cNvPr>
@@ -6907,7 +6907,7 @@
           <p:cNvPr id="3" name="">
             <a:extLst xmlns:a="http://schemas.openxmlformats.org/drawingml/2006/main">
               <a:ext uri="{FF2B5EF4-FFF2-40B4-BE49-F238E27FC236}">
-                <a16:creationId xmlns:a16="http://schemas.microsoft.com/office/drawing/2014/main" id="{2520BD16-9645-47B4-9D39-03187092945D}"/>
+                <a16:creationId xmlns:a16="http://schemas.microsoft.com/office/drawing/2014/main" id="{496A56B8-74E9-4BE8-BC9A-E7D4FD05F289}"/>
               </a:ext>
             </a:extLst>
           </p:cNvPr>
@@ -6939,7 +6939,7 @@
           <p:cNvPr id="4" name="">
             <a:extLst xmlns:a="http://schemas.openxmlformats.org/drawingml/2006/main">
               <a:ext uri="{FF2B5EF4-FFF2-40B4-BE49-F238E27FC236}">
-                <a16:creationId xmlns:a16="http://schemas.microsoft.com/office/drawing/2014/main" id="{1618F24B-4E4B-4F7F-AA8E-7ED452F2DAA4}"/>
+                <a16:creationId xmlns:a16="http://schemas.microsoft.com/office/drawing/2014/main" id="{EB7C9854-5AA2-401E-B28F-7785A331B314}"/>
               </a:ext>
             </a:extLst>
           </p:cNvPr>
@@ -6996,7 +6996,7 @@
           <p:cNvPr id="5" name="">
             <a:extLst xmlns:a="http://schemas.openxmlformats.org/drawingml/2006/main">
               <a:ext uri="{FF2B5EF4-FFF2-40B4-BE49-F238E27FC236}">
-                <a16:creationId xmlns:a16="http://schemas.microsoft.com/office/drawing/2014/main" id="{0639086C-0DBB-4547-BE1A-004FF627A702}"/>
+                <a16:creationId xmlns:a16="http://schemas.microsoft.com/office/drawing/2014/main" id="{23CC0A32-DDEA-4ADE-B4A5-4E2C621F3DDD}"/>
               </a:ext>
             </a:extLst>
           </p:cNvPr>
@@ -7053,7 +7053,7 @@
           <p:cNvPr id="6" name="">
             <a:extLst xmlns:a="http://schemas.openxmlformats.org/drawingml/2006/main">
               <a:ext uri="{FF2B5EF4-FFF2-40B4-BE49-F238E27FC236}">
-                <a16:creationId xmlns:a16="http://schemas.microsoft.com/office/drawing/2014/main" id="{EC902F3D-AB21-4B1E-B04E-9413CE353839}"/>
+                <a16:creationId xmlns:a16="http://schemas.microsoft.com/office/drawing/2014/main" id="{0D2BB5E0-58EA-4EFC-BCEC-41A77747B8B4}"/>
               </a:ext>
             </a:extLst>
           </p:cNvPr>
@@ -7110,7 +7110,7 @@
           <p:cNvPr id="7" name="">
             <a:extLst xmlns:a="http://schemas.openxmlformats.org/drawingml/2006/main">
               <a:ext uri="{FF2B5EF4-FFF2-40B4-BE49-F238E27FC236}">
-                <a16:creationId xmlns:a16="http://schemas.microsoft.com/office/drawing/2014/main" id="{FE000400-38F0-460D-B88E-9043590F940B}"/>
+                <a16:creationId xmlns:a16="http://schemas.microsoft.com/office/drawing/2014/main" id="{4EF00CC3-D82D-46A2-A141-750366143406}"/>
               </a:ext>
             </a:extLst>
           </p:cNvPr>
@@ -7142,7 +7142,7 @@
           <p:cNvPr id="8" name="">
             <a:extLst xmlns:a="http://schemas.openxmlformats.org/drawingml/2006/main">
               <a:ext uri="{FF2B5EF4-FFF2-40B4-BE49-F238E27FC236}">
-                <a16:creationId xmlns:a16="http://schemas.microsoft.com/office/drawing/2014/main" id="{3FA31127-B292-4AAD-B39C-BB1D7A19DFB0}"/>
+                <a16:creationId xmlns:a16="http://schemas.microsoft.com/office/drawing/2014/main" id="{1A63C94D-713F-488A-9885-27F8C05C882A}"/>
               </a:ext>
             </a:extLst>
           </p:cNvPr>
@@ -7199,7 +7199,7 @@
           <p:cNvPr id="9" name="">
             <a:extLst xmlns:a="http://schemas.openxmlformats.org/drawingml/2006/main">
               <a:ext uri="{FF2B5EF4-FFF2-40B4-BE49-F238E27FC236}">
-                <a16:creationId xmlns:a16="http://schemas.microsoft.com/office/drawing/2014/main" id="{B5D6A84E-6B41-4689-BD6D-8419C09C33BD}"/>
+                <a16:creationId xmlns:a16="http://schemas.microsoft.com/office/drawing/2014/main" id="{D7313118-057A-4853-A9AF-899E2232FC39}"/>
               </a:ext>
             </a:extLst>
           </p:cNvPr>
@@ -7256,7 +7256,7 @@
           <p:cNvPr id="10" name="">
             <a:extLst xmlns:a="http://schemas.openxmlformats.org/drawingml/2006/main">
               <a:ext uri="{FF2B5EF4-FFF2-40B4-BE49-F238E27FC236}">
-                <a16:creationId xmlns:a16="http://schemas.microsoft.com/office/drawing/2014/main" id="{AA6CCDAF-454C-49A5-99E0-F59E321CD23A}"/>
+                <a16:creationId xmlns:a16="http://schemas.microsoft.com/office/drawing/2014/main" id="{4ED570E3-E71B-48F3-8E4C-52299CCBDEA3}"/>
               </a:ext>
             </a:extLst>
           </p:cNvPr>
@@ -7313,7 +7313,7 @@
           <p:cNvPr id="11" name="">
             <a:extLst xmlns:a="http://schemas.openxmlformats.org/drawingml/2006/main">
               <a:ext uri="{FF2B5EF4-FFF2-40B4-BE49-F238E27FC236}">
-                <a16:creationId xmlns:a16="http://schemas.microsoft.com/office/drawing/2014/main" id="{38AD2E25-2B7A-491F-941B-74A857421004}"/>
+                <a16:creationId xmlns:a16="http://schemas.microsoft.com/office/drawing/2014/main" id="{368B763A-634E-4B99-9A32-D3861FE8E3C9}"/>
               </a:ext>
             </a:extLst>
           </p:cNvPr>
@@ -7345,7 +7345,7 @@
           <p:cNvPr id="12" name="">
             <a:extLst xmlns:a="http://schemas.openxmlformats.org/drawingml/2006/main">
               <a:ext uri="{FF2B5EF4-FFF2-40B4-BE49-F238E27FC236}">
-                <a16:creationId xmlns:a16="http://schemas.microsoft.com/office/drawing/2014/main" id="{BA55DED2-E6CF-45A7-881D-BB1628DD23FC}"/>
+                <a16:creationId xmlns:a16="http://schemas.microsoft.com/office/drawing/2014/main" id="{433C2BD4-49B1-4E6C-B557-B1A4EAB7FE94}"/>
               </a:ext>
             </a:extLst>
           </p:cNvPr>
@@ -7402,7 +7402,7 @@
           <p:cNvPr id="13" name="">
             <a:extLst xmlns:a="http://schemas.openxmlformats.org/drawingml/2006/main">
               <a:ext uri="{FF2B5EF4-FFF2-40B4-BE49-F238E27FC236}">
-                <a16:creationId xmlns:a16="http://schemas.microsoft.com/office/drawing/2014/main" id="{841519B0-5DA3-45DB-8885-877B47AD6035}"/>
+                <a16:creationId xmlns:a16="http://schemas.microsoft.com/office/drawing/2014/main" id="{F3195AB5-188E-4700-9C38-132B9C3F051C}"/>
               </a:ext>
             </a:extLst>
           </p:cNvPr>
@@ -7459,7 +7459,7 @@
           <p:cNvPr id="14" name="">
             <a:extLst xmlns:a="http://schemas.openxmlformats.org/drawingml/2006/main">
               <a:ext uri="{FF2B5EF4-FFF2-40B4-BE49-F238E27FC236}">
-                <a16:creationId xmlns:a16="http://schemas.microsoft.com/office/drawing/2014/main" id="{C2D8EFCD-2DB5-4657-AC2E-5963D1CB74E8}"/>
+                <a16:creationId xmlns:a16="http://schemas.microsoft.com/office/drawing/2014/main" id="{10B38372-FCEA-44E8-8AE7-27225678720F}"/>
               </a:ext>
             </a:extLst>
           </p:cNvPr>
@@ -7516,7 +7516,7 @@
           <p:cNvPr id="15" name="">
             <a:extLst xmlns:a="http://schemas.openxmlformats.org/drawingml/2006/main">
               <a:ext uri="{FF2B5EF4-FFF2-40B4-BE49-F238E27FC236}">
-                <a16:creationId xmlns:a16="http://schemas.microsoft.com/office/drawing/2014/main" id="{622ACB5E-41AE-4579-BFDB-E7E8AE2B5824}"/>
+                <a16:creationId xmlns:a16="http://schemas.microsoft.com/office/drawing/2014/main" id="{D7CE8BBE-C82C-4E51-A0E3-048B782CAFD5}"/>
               </a:ext>
             </a:extLst>
           </p:cNvPr>
@@ -7571,7 +7571,7 @@
     </p:spTree>
     <p:extLst>
       <p:ext uri="{BB962C8B-B14F-4D97-AF65-F5344CB8AC3E}">
-        <p14:creationId xmlns:p14="http://schemas.microsoft.com/office/powerpoint/2010/main" val="690089595"/>
+        <p14:creationId xmlns:p14="http://schemas.microsoft.com/office/powerpoint/2010/main" val="1213154358"/>
       </p:ext>
     </p:extLst>
   </p:cSld>
@@ -7769,10 +7769,10 @@
       </p:grpSpPr>
       <p:sp>
         <p:nvSpPr>
-          <p:cNvPr id="23" name="">
-            <a:extLst xmlns:a="http://schemas.openxmlformats.org/drawingml/2006/main">
-              <a:ext uri="{FF2B5EF4-FFF2-40B4-BE49-F238E27FC236}">
-                <a16:creationId xmlns:a16="http://schemas.microsoft.com/office/drawing/2014/main" id="{145D6C99-74BF-48EA-B6AB-D04706672D1F}"/>
+          <p:cNvPr id="26" name="">
+            <a:extLst xmlns:a="http://schemas.openxmlformats.org/drawingml/2006/main">
+              <a:ext uri="{FF2B5EF4-FFF2-40B4-BE49-F238E27FC236}">
+                <a16:creationId xmlns:a16="http://schemas.microsoft.com/office/drawing/2014/main" id="{AC293205-A8D9-425C-96A0-D18D0F227F62}"/>
               </a:ext>
             </a:extLst>
           </p:cNvPr>
@@ -7804,7 +7804,7 @@
           <p:cNvPr id="2" name="">
             <a:extLst xmlns:a="http://schemas.openxmlformats.org/drawingml/2006/main">
               <a:ext uri="{FF2B5EF4-FFF2-40B4-BE49-F238E27FC236}">
-                <a16:creationId xmlns:a16="http://schemas.microsoft.com/office/drawing/2014/main" id="{0140E88B-C42D-4F56-835B-8FEF6FB28205}"/>
+                <a16:creationId xmlns:a16="http://schemas.microsoft.com/office/drawing/2014/main" id="{F69A72F8-B5E1-4896-9D0D-1EDB026ABFDA}"/>
               </a:ext>
             </a:extLst>
           </p:cNvPr>
@@ -7861,7 +7861,7 @@
           <p:cNvPr id="3" name="">
             <a:extLst xmlns:a="http://schemas.openxmlformats.org/drawingml/2006/main">
               <a:ext uri="{FF2B5EF4-FFF2-40B4-BE49-F238E27FC236}">
-                <a16:creationId xmlns:a16="http://schemas.microsoft.com/office/drawing/2014/main" id="{44284F9F-9654-4490-B754-6B65E5536D67}"/>
+                <a16:creationId xmlns:a16="http://schemas.microsoft.com/office/drawing/2014/main" id="{2B5F6C42-4DCA-413A-8690-AD61534783B3}"/>
               </a:ext>
             </a:extLst>
           </p:cNvPr>
@@ -7893,7 +7893,7 @@
           <p:cNvPr id="4" name="">
             <a:extLst xmlns:a="http://schemas.openxmlformats.org/drawingml/2006/main">
               <a:ext uri="{FF2B5EF4-FFF2-40B4-BE49-F238E27FC236}">
-                <a16:creationId xmlns:a16="http://schemas.microsoft.com/office/drawing/2014/main" id="{1BC96E03-DDBC-4EAB-836F-0B5C273EC16A}"/>
+                <a16:creationId xmlns:a16="http://schemas.microsoft.com/office/drawing/2014/main" id="{20449DBF-756C-42E7-8C47-B40F01BCD96D}"/>
               </a:ext>
             </a:extLst>
           </p:cNvPr>
@@ -7950,7 +7950,7 @@
           <p:cNvPr id="5" name="">
             <a:extLst xmlns:a="http://schemas.openxmlformats.org/drawingml/2006/main">
               <a:ext uri="{FF2B5EF4-FFF2-40B4-BE49-F238E27FC236}">
-                <a16:creationId xmlns:a16="http://schemas.microsoft.com/office/drawing/2014/main" id="{353E752E-5E96-4823-903E-7D95D2E40FC2}"/>
+                <a16:creationId xmlns:a16="http://schemas.microsoft.com/office/drawing/2014/main" id="{49D97309-7547-4040-914E-8398EB164240}"/>
               </a:ext>
             </a:extLst>
           </p:cNvPr>
@@ -8007,7 +8007,7 @@
           <p:cNvPr id="6" name="">
             <a:extLst xmlns:a="http://schemas.openxmlformats.org/drawingml/2006/main">
               <a:ext uri="{FF2B5EF4-FFF2-40B4-BE49-F238E27FC236}">
-                <a16:creationId xmlns:a16="http://schemas.microsoft.com/office/drawing/2014/main" id="{F815CD1E-FBE7-4888-B09F-F5778D314560}"/>
+                <a16:creationId xmlns:a16="http://schemas.microsoft.com/office/drawing/2014/main" id="{471D174E-9357-4973-A21B-DE1A493EB64B}"/>
               </a:ext>
             </a:extLst>
           </p:cNvPr>
@@ -8064,7 +8064,7 @@
           <p:cNvPr id="7" name="">
             <a:extLst xmlns:a="http://schemas.openxmlformats.org/drawingml/2006/main">
               <a:ext uri="{FF2B5EF4-FFF2-40B4-BE49-F238E27FC236}">
-                <a16:creationId xmlns:a16="http://schemas.microsoft.com/office/drawing/2014/main" id="{288DEA41-B283-46D1-90A8-A10ACC6FE63A}"/>
+                <a16:creationId xmlns:a16="http://schemas.microsoft.com/office/drawing/2014/main" id="{339B1426-E329-49C2-A961-E4F1805ACE0D}"/>
               </a:ext>
             </a:extLst>
           </p:cNvPr>
@@ -8096,7 +8096,7 @@
           <p:cNvPr id="8" name="">
             <a:extLst xmlns:a="http://schemas.openxmlformats.org/drawingml/2006/main">
               <a:ext uri="{FF2B5EF4-FFF2-40B4-BE49-F238E27FC236}">
-                <a16:creationId xmlns:a16="http://schemas.microsoft.com/office/drawing/2014/main" id="{F1A0A69C-2855-44AD-920E-62B2D1275DE7}"/>
+                <a16:creationId xmlns:a16="http://schemas.microsoft.com/office/drawing/2014/main" id="{5A9C5125-2573-4CEB-ABDE-82697CE2DC7D}"/>
               </a:ext>
             </a:extLst>
           </p:cNvPr>
@@ -8153,7 +8153,7 @@
           <p:cNvPr id="9" name="">
             <a:extLst xmlns:a="http://schemas.openxmlformats.org/drawingml/2006/main">
               <a:ext uri="{FF2B5EF4-FFF2-40B4-BE49-F238E27FC236}">
-                <a16:creationId xmlns:a16="http://schemas.microsoft.com/office/drawing/2014/main" id="{A4F60CAB-4233-4E66-A7F6-8B2A070F4350}"/>
+                <a16:creationId xmlns:a16="http://schemas.microsoft.com/office/drawing/2014/main" id="{0401FC49-EB48-4DDC-A7A6-516B1F98BC5E}"/>
               </a:ext>
             </a:extLst>
           </p:cNvPr>
@@ -8210,19 +8210,19 @@
           <p:cNvPr id="10" name="">
             <a:extLst xmlns:a="http://schemas.openxmlformats.org/drawingml/2006/main">
               <a:ext uri="{FF2B5EF4-FFF2-40B4-BE49-F238E27FC236}">
-                <a16:creationId xmlns:a16="http://schemas.microsoft.com/office/drawing/2014/main" id="{B5AB4DF6-D7EA-42B7-976E-DC49D999562F}"/>
-              </a:ext>
-            </a:extLst>
-          </p:cNvPr>
-          <p:cNvSpPr>
-            <a:spLocks xmlns:a="http://schemas.openxmlformats.org/drawingml/2006/main" noGrp="1"/>
-          </p:cNvSpPr>
-          <p:nvPr/>
-        </p:nvSpPr>
-        <p:spPr>
-          <a:xfrm xmlns:a="http://schemas.openxmlformats.org/drawingml/2006/main">
-            <a:off x="914400" y="1257300"/>
-            <a:ext cx="10363200" cy="781050"/>
+                <a16:creationId xmlns:a16="http://schemas.microsoft.com/office/drawing/2014/main" id="{91552EAC-56D2-498A-9351-EAF1CE6529CE}"/>
+              </a:ext>
+            </a:extLst>
+          </p:cNvPr>
+          <p:cNvSpPr>
+            <a:spLocks xmlns:a="http://schemas.openxmlformats.org/drawingml/2006/main" noGrp="1"/>
+          </p:cNvSpPr>
+          <p:nvPr/>
+        </p:nvSpPr>
+        <p:spPr>
+          <a:xfrm xmlns:a="http://schemas.openxmlformats.org/drawingml/2006/main">
+            <a:off x="857250" y="1219200"/>
+            <a:ext cx="10477500" cy="742950"/>
           </a:xfrm>
           <a:prstGeom xmlns:a="http://schemas.openxmlformats.org/drawingml/2006/main" prst="rect">
             <a:avLst/>
@@ -8239,7 +8239,7 @@
           <a:lstStyle xmlns:a="http://schemas.openxmlformats.org/drawingml/2006/main"/>
           <a:p xmlns:a="http://schemas.openxmlformats.org/drawingml/2006/main">
             <a:pPr algn="ctr">
-              <a:defRPr sz="2175" b="1">
+              <a:defRPr sz="2100" b="1">
                 <a:solidFill>
                   <a:srgbClr val="17253A"/>
                 </a:solidFill>
@@ -8249,7 +8249,7 @@
               </a:defRPr>
             </a:pPr>
             <a:r>
-              <a:rPr sz="2175" b="1">
+              <a:rPr sz="2100" b="1">
                 <a:solidFill>
                   <a:srgbClr val="17253A"/>
                 </a:solidFill>
@@ -8267,28 +8267,30 @@
           <p:cNvPr id="11" name="">
             <a:extLst xmlns:a="http://schemas.openxmlformats.org/drawingml/2006/main">
               <a:ext uri="{FF2B5EF4-FFF2-40B4-BE49-F238E27FC236}">
-                <a16:creationId xmlns:a16="http://schemas.microsoft.com/office/drawing/2014/main" id="{3D7301CE-EF59-4953-9A5A-9414ED5544BF}"/>
-              </a:ext>
-            </a:extLst>
-          </p:cNvPr>
-          <p:cNvSpPr>
-            <a:spLocks xmlns:a="http://schemas.openxmlformats.org/drawingml/2006/main" noGrp="1"/>
-          </p:cNvSpPr>
-          <p:nvPr/>
-        </p:nvSpPr>
-        <p:spPr>
-          <a:xfrm xmlns:a="http://schemas.openxmlformats.org/drawingml/2006/main">
-            <a:off x="1000125" y="2247900"/>
-            <a:ext cx="476250" cy="476250"/>
-          </a:xfrm>
-          <a:prstGeom xmlns:a="http://schemas.openxmlformats.org/drawingml/2006/main" prst="ellipse">
+                <a16:creationId xmlns:a16="http://schemas.microsoft.com/office/drawing/2014/main" id="{A5A121EF-B0ED-40F0-880E-7ECC911CB3E3}"/>
+              </a:ext>
+            </a:extLst>
+          </p:cNvPr>
+          <p:cNvSpPr>
+            <a:spLocks xmlns:a="http://schemas.openxmlformats.org/drawingml/2006/main" noGrp="1"/>
+          </p:cNvSpPr>
+          <p:nvPr/>
+        </p:nvSpPr>
+        <p:spPr>
+          <a:xfrm xmlns:a="http://schemas.openxmlformats.org/drawingml/2006/main">
+            <a:off x="971550" y="2124075"/>
+            <a:ext cx="38100" cy="3524250"/>
+          </a:xfrm>
+          <a:prstGeom xmlns:a="http://schemas.openxmlformats.org/drawingml/2006/main" prst="rect">
             <a:avLst/>
           </a:prstGeom>
           <a:solidFill xmlns:a="http://schemas.openxmlformats.org/drawingml/2006/main">
-            <a:srgbClr val="18324A"/>
+            <a:srgbClr val="2C6E73"/>
           </a:solidFill>
           <a:ln xmlns:a="http://schemas.openxmlformats.org/drawingml/2006/main" w="0">
-            <a:noFill/>
+            <a:solidFill>
+              <a:srgbClr val="2C6E73"/>
+            </a:solidFill>
           </a:ln>
         </p:spPr>
       </p:sp>
@@ -8297,19 +8299,19 @@
           <p:cNvPr id="12" name="">
             <a:extLst xmlns:a="http://schemas.openxmlformats.org/drawingml/2006/main">
               <a:ext uri="{FF2B5EF4-FFF2-40B4-BE49-F238E27FC236}">
-                <a16:creationId xmlns:a16="http://schemas.microsoft.com/office/drawing/2014/main" id="{99FBB228-8E67-4A6F-98D1-89A7D026BD9F}"/>
-              </a:ext>
-            </a:extLst>
-          </p:cNvPr>
-          <p:cNvSpPr>
-            <a:spLocks xmlns:a="http://schemas.openxmlformats.org/drawingml/2006/main" noGrp="1"/>
-          </p:cNvSpPr>
-          <p:nvPr/>
-        </p:nvSpPr>
-        <p:spPr>
-          <a:xfrm xmlns:a="http://schemas.openxmlformats.org/drawingml/2006/main">
-            <a:off x="1000125" y="2276475"/>
-            <a:ext cx="476250" cy="419100"/>
+                <a16:creationId xmlns:a16="http://schemas.microsoft.com/office/drawing/2014/main" id="{9FAE4C0C-F89C-4091-BE42-E0C15B1E33D2}"/>
+              </a:ext>
+            </a:extLst>
+          </p:cNvPr>
+          <p:cNvSpPr>
+            <a:spLocks xmlns:a="http://schemas.openxmlformats.org/drawingml/2006/main" noGrp="1"/>
+          </p:cNvSpPr>
+          <p:nvPr/>
+        </p:nvSpPr>
+        <p:spPr>
+          <a:xfrm xmlns:a="http://schemas.openxmlformats.org/drawingml/2006/main">
+            <a:off x="1162050" y="2200275"/>
+            <a:ext cx="400050" cy="400050"/>
           </a:xfrm>
           <a:prstGeom xmlns:a="http://schemas.openxmlformats.org/drawingml/2006/main" prst="rect">
             <a:avLst/>
@@ -8326,9 +8328,9 @@
           <a:lstStyle xmlns:a="http://schemas.openxmlformats.org/drawingml/2006/main"/>
           <a:p xmlns:a="http://schemas.openxmlformats.org/drawingml/2006/main">
             <a:pPr algn="ctr">
-              <a:defRPr sz="1350" b="1">
-                <a:solidFill>
-                  <a:srgbClr val="FFFFFF"/>
+              <a:defRPr sz="1125" b="1">
+                <a:solidFill>
+                  <a:srgbClr val="2C6E73"/>
                 </a:solidFill>
                 <a:latin typeface="Arial"/>
                 <a:ea typeface="Arial"/>
@@ -8336,9 +8338,9 @@
               </a:defRPr>
             </a:pPr>
             <a:r>
-              <a:rPr sz="1350" b="1">
-                <a:solidFill>
-                  <a:srgbClr val="FFFFFF"/>
+              <a:rPr sz="1125" b="1">
+                <a:solidFill>
+                  <a:srgbClr val="2C6E73"/>
                 </a:solidFill>
                 <a:latin typeface="Arial"/>
                 <a:ea typeface="Arial"/>
@@ -8354,19 +8356,19 @@
           <p:cNvPr id="13" name="">
             <a:extLst xmlns:a="http://schemas.openxmlformats.org/drawingml/2006/main">
               <a:ext uri="{FF2B5EF4-FFF2-40B4-BE49-F238E27FC236}">
-                <a16:creationId xmlns:a16="http://schemas.microsoft.com/office/drawing/2014/main" id="{62C2BAF0-43A2-4BB7-A4D1-018F0252A1C8}"/>
-              </a:ext>
-            </a:extLst>
-          </p:cNvPr>
-          <p:cNvSpPr>
-            <a:spLocks xmlns:a="http://schemas.openxmlformats.org/drawingml/2006/main" noGrp="1"/>
-          </p:cNvSpPr>
-          <p:nvPr/>
-        </p:nvSpPr>
-        <p:spPr>
-          <a:xfrm xmlns:a="http://schemas.openxmlformats.org/drawingml/2006/main">
-            <a:off x="1714500" y="2181225"/>
-            <a:ext cx="9429750" cy="609600"/>
+                <a16:creationId xmlns:a16="http://schemas.microsoft.com/office/drawing/2014/main" id="{FA2846B5-9FEF-40B9-9BDD-E8302A5CE45A}"/>
+              </a:ext>
+            </a:extLst>
+          </p:cNvPr>
+          <p:cNvSpPr>
+            <a:spLocks xmlns:a="http://schemas.openxmlformats.org/drawingml/2006/main" noGrp="1"/>
+          </p:cNvSpPr>
+          <p:nvPr/>
+        </p:nvSpPr>
+        <p:spPr>
+          <a:xfrm xmlns:a="http://schemas.openxmlformats.org/drawingml/2006/main">
+            <a:off x="1714500" y="2114550"/>
+            <a:ext cx="9525000" cy="638175"/>
           </a:xfrm>
           <a:prstGeom xmlns:a="http://schemas.openxmlformats.org/drawingml/2006/main" prst="rect">
             <a:avLst/>
@@ -8383,7 +8385,7 @@
           <a:lstStyle xmlns:a="http://schemas.openxmlformats.org/drawingml/2006/main"/>
           <a:p xmlns:a="http://schemas.openxmlformats.org/drawingml/2006/main">
             <a:pPr algn="l">
-              <a:defRPr sz="1500" b="0">
+              <a:defRPr sz="1575" b="0">
                 <a:solidFill>
                   <a:srgbClr val="17253A"/>
                 </a:solidFill>
@@ -8393,7 +8395,7 @@
               </a:defRPr>
             </a:pPr>
             <a:r>
-              <a:rPr sz="1500" b="0">
+              <a:rPr sz="1575" b="0">
                 <a:solidFill>
                   <a:srgbClr val="17253A"/>
                 </a:solidFill>
@@ -8401,7 +8403,7 @@
                 <a:ea typeface="Arial"/>
                 <a:cs typeface="Arial"/>
               </a:rPr>
-              <a:t>Identify the structure: Estimate the product before calculating.</a:t>
+              <a:t>3,482 × 6</a:t>
             </a:r>
           </a:p>
         </p:txBody>
@@ -8411,28 +8413,30 @@
           <p:cNvPr id="14" name="">
             <a:extLst xmlns:a="http://schemas.openxmlformats.org/drawingml/2006/main">
               <a:ext uri="{FF2B5EF4-FFF2-40B4-BE49-F238E27FC236}">
-                <a16:creationId xmlns:a16="http://schemas.microsoft.com/office/drawing/2014/main" id="{F7063138-D786-4430-AC05-5BA69AE8BD6C}"/>
-              </a:ext>
-            </a:extLst>
-          </p:cNvPr>
-          <p:cNvSpPr>
-            <a:spLocks xmlns:a="http://schemas.openxmlformats.org/drawingml/2006/main" noGrp="1"/>
-          </p:cNvSpPr>
-          <p:nvPr/>
-        </p:nvSpPr>
-        <p:spPr>
-          <a:xfrm xmlns:a="http://schemas.openxmlformats.org/drawingml/2006/main">
-            <a:off x="1000125" y="2990850"/>
-            <a:ext cx="476250" cy="476250"/>
-          </a:xfrm>
-          <a:prstGeom xmlns:a="http://schemas.openxmlformats.org/drawingml/2006/main" prst="ellipse">
+                <a16:creationId xmlns:a16="http://schemas.microsoft.com/office/drawing/2014/main" id="{432B6271-B6FC-414D-8395-568938BFB0AC}"/>
+              </a:ext>
+            </a:extLst>
+          </p:cNvPr>
+          <p:cNvSpPr>
+            <a:spLocks xmlns:a="http://schemas.openxmlformats.org/drawingml/2006/main" noGrp="1"/>
+          </p:cNvSpPr>
+          <p:nvPr/>
+        </p:nvSpPr>
+        <p:spPr>
+          <a:xfrm xmlns:a="http://schemas.openxmlformats.org/drawingml/2006/main">
+            <a:off x="1714500" y="2771775"/>
+            <a:ext cx="9334500" cy="9525"/>
+          </a:xfrm>
+          <a:prstGeom xmlns:a="http://schemas.openxmlformats.org/drawingml/2006/main" prst="rect">
             <a:avLst/>
           </a:prstGeom>
           <a:solidFill xmlns:a="http://schemas.openxmlformats.org/drawingml/2006/main">
-            <a:srgbClr val="2C6E73"/>
+            <a:srgbClr val="D9E0E6"/>
           </a:solidFill>
           <a:ln xmlns:a="http://schemas.openxmlformats.org/drawingml/2006/main" w="0">
-            <a:noFill/>
+            <a:solidFill>
+              <a:srgbClr val="D9E0E6"/>
+            </a:solidFill>
           </a:ln>
         </p:spPr>
       </p:sp>
@@ -8441,19 +8445,19 @@
           <p:cNvPr id="15" name="">
             <a:extLst xmlns:a="http://schemas.openxmlformats.org/drawingml/2006/main">
               <a:ext uri="{FF2B5EF4-FFF2-40B4-BE49-F238E27FC236}">
-                <a16:creationId xmlns:a16="http://schemas.microsoft.com/office/drawing/2014/main" id="{568C191F-C24A-4E75-99EB-624948DEB8A0}"/>
-              </a:ext>
-            </a:extLst>
-          </p:cNvPr>
-          <p:cNvSpPr>
-            <a:spLocks xmlns:a="http://schemas.openxmlformats.org/drawingml/2006/main" noGrp="1"/>
-          </p:cNvSpPr>
-          <p:nvPr/>
-        </p:nvSpPr>
-        <p:spPr>
-          <a:xfrm xmlns:a="http://schemas.openxmlformats.org/drawingml/2006/main">
-            <a:off x="1000125" y="3019425"/>
-            <a:ext cx="476250" cy="419100"/>
+                <a16:creationId xmlns:a16="http://schemas.microsoft.com/office/drawing/2014/main" id="{1D3C187B-84EA-465D-AD56-E3F0E0A4A465}"/>
+              </a:ext>
+            </a:extLst>
+          </p:cNvPr>
+          <p:cNvSpPr>
+            <a:spLocks xmlns:a="http://schemas.openxmlformats.org/drawingml/2006/main" noGrp="1"/>
+          </p:cNvSpPr>
+          <p:nvPr/>
+        </p:nvSpPr>
+        <p:spPr>
+          <a:xfrm xmlns:a="http://schemas.openxmlformats.org/drawingml/2006/main">
+            <a:off x="1162050" y="2905125"/>
+            <a:ext cx="400050" cy="400050"/>
           </a:xfrm>
           <a:prstGeom xmlns:a="http://schemas.openxmlformats.org/drawingml/2006/main" prst="rect">
             <a:avLst/>
@@ -8470,9 +8474,9 @@
           <a:lstStyle xmlns:a="http://schemas.openxmlformats.org/drawingml/2006/main"/>
           <a:p xmlns:a="http://schemas.openxmlformats.org/drawingml/2006/main">
             <a:pPr algn="ctr">
-              <a:defRPr sz="1350" b="1">
-                <a:solidFill>
-                  <a:srgbClr val="FFFFFF"/>
+              <a:defRPr sz="1125" b="1">
+                <a:solidFill>
+                  <a:srgbClr val="2C6E73"/>
                 </a:solidFill>
                 <a:latin typeface="Arial"/>
                 <a:ea typeface="Arial"/>
@@ -8480,9 +8484,9 @@
               </a:defRPr>
             </a:pPr>
             <a:r>
-              <a:rPr sz="1350" b="1">
-                <a:solidFill>
-                  <a:srgbClr val="FFFFFF"/>
+              <a:rPr sz="1125" b="1">
+                <a:solidFill>
+                  <a:srgbClr val="2C6E73"/>
                 </a:solidFill>
                 <a:latin typeface="Arial"/>
                 <a:ea typeface="Arial"/>
@@ -8498,19 +8502,19 @@
           <p:cNvPr id="16" name="">
             <a:extLst xmlns:a="http://schemas.openxmlformats.org/drawingml/2006/main">
               <a:ext uri="{FF2B5EF4-FFF2-40B4-BE49-F238E27FC236}">
-                <a16:creationId xmlns:a16="http://schemas.microsoft.com/office/drawing/2014/main" id="{EA8B2C65-E1CD-4243-8E83-CA5DAF54783F}"/>
-              </a:ext>
-            </a:extLst>
-          </p:cNvPr>
-          <p:cNvSpPr>
-            <a:spLocks xmlns:a="http://schemas.openxmlformats.org/drawingml/2006/main" noGrp="1"/>
-          </p:cNvSpPr>
-          <p:nvPr/>
-        </p:nvSpPr>
-        <p:spPr>
-          <a:xfrm xmlns:a="http://schemas.openxmlformats.org/drawingml/2006/main">
-            <a:off x="1714500" y="2924175"/>
-            <a:ext cx="9429750" cy="609600"/>
+                <a16:creationId xmlns:a16="http://schemas.microsoft.com/office/drawing/2014/main" id="{A0EAE848-4655-4292-A029-3C78B2292BD4}"/>
+              </a:ext>
+            </a:extLst>
+          </p:cNvPr>
+          <p:cNvSpPr>
+            <a:spLocks xmlns:a="http://schemas.openxmlformats.org/drawingml/2006/main" noGrp="1"/>
+          </p:cNvSpPr>
+          <p:nvPr/>
+        </p:nvSpPr>
+        <p:spPr>
+          <a:xfrm xmlns:a="http://schemas.openxmlformats.org/drawingml/2006/main">
+            <a:off x="1714500" y="2819400"/>
+            <a:ext cx="9525000" cy="638175"/>
           </a:xfrm>
           <a:prstGeom xmlns:a="http://schemas.openxmlformats.org/drawingml/2006/main" prst="rect">
             <a:avLst/>
@@ -8527,7 +8531,7 @@
           <a:lstStyle xmlns:a="http://schemas.openxmlformats.org/drawingml/2006/main"/>
           <a:p xmlns:a="http://schemas.openxmlformats.org/drawingml/2006/main">
             <a:pPr algn="l">
-              <a:defRPr sz="1500" b="0">
+              <a:defRPr sz="1575" b="0">
                 <a:solidFill>
                   <a:srgbClr val="17253A"/>
                 </a:solidFill>
@@ -8537,7 +8541,7 @@
               </a:defRPr>
             </a:pPr>
             <a:r>
-              <a:rPr sz="1500" b="0">
+              <a:rPr sz="1575" b="0">
                 <a:solidFill>
                   <a:srgbClr val="17253A"/>
                 </a:solidFill>
@@ -8545,7 +8549,7 @@
                 <a:ea typeface="Arial"/>
                 <a:cs typeface="Arial"/>
               </a:rPr>
-              <a:t>Set up the method: Multiply by the ones, then multiply by the tens using correct place value.</a:t>
+              <a:t>6 × 2 = 12: write 2, carry 1</a:t>
             </a:r>
           </a:p>
         </p:txBody>
@@ -8555,28 +8559,30 @@
           <p:cNvPr id="17" name="">
             <a:extLst xmlns:a="http://schemas.openxmlformats.org/drawingml/2006/main">
               <a:ext uri="{FF2B5EF4-FFF2-40B4-BE49-F238E27FC236}">
-                <a16:creationId xmlns:a16="http://schemas.microsoft.com/office/drawing/2014/main" id="{8974AF71-B753-449E-9C13-8AAB55C98E83}"/>
-              </a:ext>
-            </a:extLst>
-          </p:cNvPr>
-          <p:cNvSpPr>
-            <a:spLocks xmlns:a="http://schemas.openxmlformats.org/drawingml/2006/main" noGrp="1"/>
-          </p:cNvSpPr>
-          <p:nvPr/>
-        </p:nvSpPr>
-        <p:spPr>
-          <a:xfrm xmlns:a="http://schemas.openxmlformats.org/drawingml/2006/main">
-            <a:off x="1000125" y="3733800"/>
-            <a:ext cx="476250" cy="476250"/>
-          </a:xfrm>
-          <a:prstGeom xmlns:a="http://schemas.openxmlformats.org/drawingml/2006/main" prst="ellipse">
+                <a16:creationId xmlns:a16="http://schemas.microsoft.com/office/drawing/2014/main" id="{FA4D5A97-4A81-4305-9F5E-81B988FD1A77}"/>
+              </a:ext>
+            </a:extLst>
+          </p:cNvPr>
+          <p:cNvSpPr>
+            <a:spLocks xmlns:a="http://schemas.openxmlformats.org/drawingml/2006/main" noGrp="1"/>
+          </p:cNvSpPr>
+          <p:nvPr/>
+        </p:nvSpPr>
+        <p:spPr>
+          <a:xfrm xmlns:a="http://schemas.openxmlformats.org/drawingml/2006/main">
+            <a:off x="1714500" y="3476625"/>
+            <a:ext cx="9334500" cy="9525"/>
+          </a:xfrm>
+          <a:prstGeom xmlns:a="http://schemas.openxmlformats.org/drawingml/2006/main" prst="rect">
             <a:avLst/>
           </a:prstGeom>
           <a:solidFill xmlns:a="http://schemas.openxmlformats.org/drawingml/2006/main">
-            <a:srgbClr val="2C6E73"/>
+            <a:srgbClr val="D9E0E6"/>
           </a:solidFill>
           <a:ln xmlns:a="http://schemas.openxmlformats.org/drawingml/2006/main" w="0">
-            <a:noFill/>
+            <a:solidFill>
+              <a:srgbClr val="D9E0E6"/>
+            </a:solidFill>
           </a:ln>
         </p:spPr>
       </p:sp>
@@ -8585,19 +8591,19 @@
           <p:cNvPr id="18" name="">
             <a:extLst xmlns:a="http://schemas.openxmlformats.org/drawingml/2006/main">
               <a:ext uri="{FF2B5EF4-FFF2-40B4-BE49-F238E27FC236}">
-                <a16:creationId xmlns:a16="http://schemas.microsoft.com/office/drawing/2014/main" id="{B842F5AB-57B7-4B58-9969-57014A639E1C}"/>
-              </a:ext>
-            </a:extLst>
-          </p:cNvPr>
-          <p:cNvSpPr>
-            <a:spLocks xmlns:a="http://schemas.openxmlformats.org/drawingml/2006/main" noGrp="1"/>
-          </p:cNvSpPr>
-          <p:nvPr/>
-        </p:nvSpPr>
-        <p:spPr>
-          <a:xfrm xmlns:a="http://schemas.openxmlformats.org/drawingml/2006/main">
-            <a:off x="1000125" y="3762375"/>
-            <a:ext cx="476250" cy="419100"/>
+                <a16:creationId xmlns:a16="http://schemas.microsoft.com/office/drawing/2014/main" id="{ED902538-D955-41C6-8B3A-D9CE04D6A7E8}"/>
+              </a:ext>
+            </a:extLst>
+          </p:cNvPr>
+          <p:cNvSpPr>
+            <a:spLocks xmlns:a="http://schemas.openxmlformats.org/drawingml/2006/main" noGrp="1"/>
+          </p:cNvSpPr>
+          <p:nvPr/>
+        </p:nvSpPr>
+        <p:spPr>
+          <a:xfrm xmlns:a="http://schemas.openxmlformats.org/drawingml/2006/main">
+            <a:off x="1162050" y="3609975"/>
+            <a:ext cx="400050" cy="400050"/>
           </a:xfrm>
           <a:prstGeom xmlns:a="http://schemas.openxmlformats.org/drawingml/2006/main" prst="rect">
             <a:avLst/>
@@ -8614,9 +8620,9 @@
           <a:lstStyle xmlns:a="http://schemas.openxmlformats.org/drawingml/2006/main"/>
           <a:p xmlns:a="http://schemas.openxmlformats.org/drawingml/2006/main">
             <a:pPr algn="ctr">
-              <a:defRPr sz="1350" b="1">
-                <a:solidFill>
-                  <a:srgbClr val="FFFFFF"/>
+              <a:defRPr sz="1125" b="1">
+                <a:solidFill>
+                  <a:srgbClr val="2C6E73"/>
                 </a:solidFill>
                 <a:latin typeface="Arial"/>
                 <a:ea typeface="Arial"/>
@@ -8624,9 +8630,9 @@
               </a:defRPr>
             </a:pPr>
             <a:r>
-              <a:rPr sz="1350" b="1">
-                <a:solidFill>
-                  <a:srgbClr val="FFFFFF"/>
+              <a:rPr sz="1125" b="1">
+                <a:solidFill>
+                  <a:srgbClr val="2C6E73"/>
                 </a:solidFill>
                 <a:latin typeface="Arial"/>
                 <a:ea typeface="Arial"/>
@@ -8642,19 +8648,19 @@
           <p:cNvPr id="19" name="">
             <a:extLst xmlns:a="http://schemas.openxmlformats.org/drawingml/2006/main">
               <a:ext uri="{FF2B5EF4-FFF2-40B4-BE49-F238E27FC236}">
-                <a16:creationId xmlns:a16="http://schemas.microsoft.com/office/drawing/2014/main" id="{A13AE2CF-26DF-4796-8446-45B619A58D8A}"/>
-              </a:ext>
-            </a:extLst>
-          </p:cNvPr>
-          <p:cNvSpPr>
-            <a:spLocks xmlns:a="http://schemas.openxmlformats.org/drawingml/2006/main" noGrp="1"/>
-          </p:cNvSpPr>
-          <p:nvPr/>
-        </p:nvSpPr>
-        <p:spPr>
-          <a:xfrm xmlns:a="http://schemas.openxmlformats.org/drawingml/2006/main">
-            <a:off x="1714500" y="3667125"/>
-            <a:ext cx="9429750" cy="609600"/>
+                <a16:creationId xmlns:a16="http://schemas.microsoft.com/office/drawing/2014/main" id="{C2CE0BB8-9BF5-4FDD-B430-90081356E363}"/>
+              </a:ext>
+            </a:extLst>
+          </p:cNvPr>
+          <p:cNvSpPr>
+            <a:spLocks xmlns:a="http://schemas.openxmlformats.org/drawingml/2006/main" noGrp="1"/>
+          </p:cNvSpPr>
+          <p:nvPr/>
+        </p:nvSpPr>
+        <p:spPr>
+          <a:xfrm xmlns:a="http://schemas.openxmlformats.org/drawingml/2006/main">
+            <a:off x="1714500" y="3524250"/>
+            <a:ext cx="9525000" cy="638175"/>
           </a:xfrm>
           <a:prstGeom xmlns:a="http://schemas.openxmlformats.org/drawingml/2006/main" prst="rect">
             <a:avLst/>
@@ -8671,7 +8677,7 @@
           <a:lstStyle xmlns:a="http://schemas.openxmlformats.org/drawingml/2006/main"/>
           <a:p xmlns:a="http://schemas.openxmlformats.org/drawingml/2006/main">
             <a:pPr algn="l">
-              <a:defRPr sz="1500" b="0">
+              <a:defRPr sz="1575" b="0">
                 <a:solidFill>
                   <a:srgbClr val="17253A"/>
                 </a:solidFill>
@@ -8681,7 +8687,7 @@
               </a:defRPr>
             </a:pPr>
             <a:r>
-              <a:rPr sz="1500" b="0">
+              <a:rPr sz="1575" b="0">
                 <a:solidFill>
                   <a:srgbClr val="17253A"/>
                 </a:solidFill>
@@ -8689,7 +8695,7 @@
                 <a:ea typeface="Arial"/>
                 <a:cs typeface="Arial"/>
               </a:rPr>
-              <a:t>Complete the calculation: 20,892.</a:t>
+              <a:t>6 × 8 + 1 = 49: write 9, carry 4</a:t>
             </a:r>
           </a:p>
         </p:txBody>
@@ -8699,28 +8705,30 @@
           <p:cNvPr id="20" name="">
             <a:extLst xmlns:a="http://schemas.openxmlformats.org/drawingml/2006/main">
               <a:ext uri="{FF2B5EF4-FFF2-40B4-BE49-F238E27FC236}">
-                <a16:creationId xmlns:a16="http://schemas.microsoft.com/office/drawing/2014/main" id="{B1283CFC-1A68-4EBD-8FC8-FD7AA38860AB}"/>
-              </a:ext>
-            </a:extLst>
-          </p:cNvPr>
-          <p:cNvSpPr>
-            <a:spLocks xmlns:a="http://schemas.openxmlformats.org/drawingml/2006/main" noGrp="1"/>
-          </p:cNvSpPr>
-          <p:nvPr/>
-        </p:nvSpPr>
-        <p:spPr>
-          <a:xfrm xmlns:a="http://schemas.openxmlformats.org/drawingml/2006/main">
-            <a:off x="1000125" y="4476750"/>
-            <a:ext cx="476250" cy="476250"/>
-          </a:xfrm>
-          <a:prstGeom xmlns:a="http://schemas.openxmlformats.org/drawingml/2006/main" prst="ellipse">
+                <a16:creationId xmlns:a16="http://schemas.microsoft.com/office/drawing/2014/main" id="{18B6DAE0-E1BA-4B35-B7FC-661FEECDA867}"/>
+              </a:ext>
+            </a:extLst>
+          </p:cNvPr>
+          <p:cNvSpPr>
+            <a:spLocks xmlns:a="http://schemas.openxmlformats.org/drawingml/2006/main" noGrp="1"/>
+          </p:cNvSpPr>
+          <p:nvPr/>
+        </p:nvSpPr>
+        <p:spPr>
+          <a:xfrm xmlns:a="http://schemas.openxmlformats.org/drawingml/2006/main">
+            <a:off x="1714500" y="4181475"/>
+            <a:ext cx="9334500" cy="9525"/>
+          </a:xfrm>
+          <a:prstGeom xmlns:a="http://schemas.openxmlformats.org/drawingml/2006/main" prst="rect">
             <a:avLst/>
           </a:prstGeom>
           <a:solidFill xmlns:a="http://schemas.openxmlformats.org/drawingml/2006/main">
-            <a:srgbClr val="2C6E73"/>
+            <a:srgbClr val="D9E0E6"/>
           </a:solidFill>
           <a:ln xmlns:a="http://schemas.openxmlformats.org/drawingml/2006/main" w="0">
-            <a:noFill/>
+            <a:solidFill>
+              <a:srgbClr val="D9E0E6"/>
+            </a:solidFill>
           </a:ln>
         </p:spPr>
       </p:sp>
@@ -8729,19 +8737,19 @@
           <p:cNvPr id="21" name="">
             <a:extLst xmlns:a="http://schemas.openxmlformats.org/drawingml/2006/main">
               <a:ext uri="{FF2B5EF4-FFF2-40B4-BE49-F238E27FC236}">
-                <a16:creationId xmlns:a16="http://schemas.microsoft.com/office/drawing/2014/main" id="{53654C4F-444E-442C-B6B1-13B0EBC253F0}"/>
-              </a:ext>
-            </a:extLst>
-          </p:cNvPr>
-          <p:cNvSpPr>
-            <a:spLocks xmlns:a="http://schemas.openxmlformats.org/drawingml/2006/main" noGrp="1"/>
-          </p:cNvSpPr>
-          <p:nvPr/>
-        </p:nvSpPr>
-        <p:spPr>
-          <a:xfrm xmlns:a="http://schemas.openxmlformats.org/drawingml/2006/main">
-            <a:off x="1000125" y="4505325"/>
-            <a:ext cx="476250" cy="419100"/>
+                <a16:creationId xmlns:a16="http://schemas.microsoft.com/office/drawing/2014/main" id="{25403824-E29A-4037-91FC-11D16403FFF4}"/>
+              </a:ext>
+            </a:extLst>
+          </p:cNvPr>
+          <p:cNvSpPr>
+            <a:spLocks xmlns:a="http://schemas.openxmlformats.org/drawingml/2006/main" noGrp="1"/>
+          </p:cNvSpPr>
+          <p:nvPr/>
+        </p:nvSpPr>
+        <p:spPr>
+          <a:xfrm xmlns:a="http://schemas.openxmlformats.org/drawingml/2006/main">
+            <a:off x="1162050" y="4314825"/>
+            <a:ext cx="400050" cy="400050"/>
           </a:xfrm>
           <a:prstGeom xmlns:a="http://schemas.openxmlformats.org/drawingml/2006/main" prst="rect">
             <a:avLst/>
@@ -8758,9 +8766,9 @@
           <a:lstStyle xmlns:a="http://schemas.openxmlformats.org/drawingml/2006/main"/>
           <a:p xmlns:a="http://schemas.openxmlformats.org/drawingml/2006/main">
             <a:pPr algn="ctr">
-              <a:defRPr sz="1350" b="1">
-                <a:solidFill>
-                  <a:srgbClr val="FFFFFF"/>
+              <a:defRPr sz="1125" b="1">
+                <a:solidFill>
+                  <a:srgbClr val="2C6E73"/>
                 </a:solidFill>
                 <a:latin typeface="Arial"/>
                 <a:ea typeface="Arial"/>
@@ -8768,9 +8776,9 @@
               </a:defRPr>
             </a:pPr>
             <a:r>
-              <a:rPr sz="1350" b="1">
-                <a:solidFill>
-                  <a:srgbClr val="FFFFFF"/>
+              <a:rPr sz="1125" b="1">
+                <a:solidFill>
+                  <a:srgbClr val="2C6E73"/>
                 </a:solidFill>
                 <a:latin typeface="Arial"/>
                 <a:ea typeface="Arial"/>
@@ -8786,19 +8794,19 @@
           <p:cNvPr id="22" name="">
             <a:extLst xmlns:a="http://schemas.openxmlformats.org/drawingml/2006/main">
               <a:ext uri="{FF2B5EF4-FFF2-40B4-BE49-F238E27FC236}">
-                <a16:creationId xmlns:a16="http://schemas.microsoft.com/office/drawing/2014/main" id="{30504814-5A36-4969-ABA1-2F961B3B3772}"/>
-              </a:ext>
-            </a:extLst>
-          </p:cNvPr>
-          <p:cNvSpPr>
-            <a:spLocks xmlns:a="http://schemas.openxmlformats.org/drawingml/2006/main" noGrp="1"/>
-          </p:cNvSpPr>
-          <p:nvPr/>
-        </p:nvSpPr>
-        <p:spPr>
-          <a:xfrm xmlns:a="http://schemas.openxmlformats.org/drawingml/2006/main">
-            <a:off x="1714500" y="4410075"/>
-            <a:ext cx="9429750" cy="609600"/>
+                <a16:creationId xmlns:a16="http://schemas.microsoft.com/office/drawing/2014/main" id="{B9421BD7-099B-463E-BEC8-DD96C5B99200}"/>
+              </a:ext>
+            </a:extLst>
+          </p:cNvPr>
+          <p:cNvSpPr>
+            <a:spLocks xmlns:a="http://schemas.openxmlformats.org/drawingml/2006/main" noGrp="1"/>
+          </p:cNvSpPr>
+          <p:nvPr/>
+        </p:nvSpPr>
+        <p:spPr>
+          <a:xfrm xmlns:a="http://schemas.openxmlformats.org/drawingml/2006/main">
+            <a:off x="1714500" y="4229100"/>
+            <a:ext cx="9525000" cy="638175"/>
           </a:xfrm>
           <a:prstGeom xmlns:a="http://schemas.openxmlformats.org/drawingml/2006/main" prst="rect">
             <a:avLst/>
@@ -8815,9 +8823,9 @@
           <a:lstStyle xmlns:a="http://schemas.openxmlformats.org/drawingml/2006/main"/>
           <a:p xmlns:a="http://schemas.openxmlformats.org/drawingml/2006/main">
             <a:pPr algn="l">
-              <a:defRPr sz="1500" b="1">
-                <a:solidFill>
-                  <a:srgbClr val="2F785D"/>
+              <a:defRPr sz="1575" b="0">
+                <a:solidFill>
+                  <a:srgbClr val="17253A"/>
                 </a:solidFill>
                 <a:latin typeface="Arial"/>
                 <a:ea typeface="Arial"/>
@@ -8825,15 +8833,161 @@
               </a:defRPr>
             </a:pPr>
             <a:r>
-              <a:rPr sz="1500" b="1">
+              <a:rPr sz="1575" b="0">
+                <a:solidFill>
+                  <a:srgbClr val="17253A"/>
+                </a:solidFill>
+                <a:latin typeface="Arial"/>
+                <a:ea typeface="Arial"/>
+                <a:cs typeface="Arial"/>
+              </a:rPr>
+              <a:t>6 × 4 + 4 = 28: write 8, carry 2</a:t>
+            </a:r>
+          </a:p>
+        </p:txBody>
+      </p:sp>
+      <p:sp>
+        <p:nvSpPr>
+          <p:cNvPr id="23" name="">
+            <a:extLst xmlns:a="http://schemas.openxmlformats.org/drawingml/2006/main">
+              <a:ext uri="{FF2B5EF4-FFF2-40B4-BE49-F238E27FC236}">
+                <a16:creationId xmlns:a16="http://schemas.microsoft.com/office/drawing/2014/main" id="{D5929863-7C29-4539-9033-CC61566183D5}"/>
+              </a:ext>
+            </a:extLst>
+          </p:cNvPr>
+          <p:cNvSpPr>
+            <a:spLocks xmlns:a="http://schemas.openxmlformats.org/drawingml/2006/main" noGrp="1"/>
+          </p:cNvSpPr>
+          <p:nvPr/>
+        </p:nvSpPr>
+        <p:spPr>
+          <a:xfrm xmlns:a="http://schemas.openxmlformats.org/drawingml/2006/main">
+            <a:off x="1714500" y="4886325"/>
+            <a:ext cx="9334500" cy="9525"/>
+          </a:xfrm>
+          <a:prstGeom xmlns:a="http://schemas.openxmlformats.org/drawingml/2006/main" prst="rect">
+            <a:avLst/>
+          </a:prstGeom>
+          <a:solidFill xmlns:a="http://schemas.openxmlformats.org/drawingml/2006/main">
+            <a:srgbClr val="D9E0E6"/>
+          </a:solidFill>
+          <a:ln xmlns:a="http://schemas.openxmlformats.org/drawingml/2006/main" w="0">
+            <a:solidFill>
+              <a:srgbClr val="D9E0E6"/>
+            </a:solidFill>
+          </a:ln>
+        </p:spPr>
+      </p:sp>
+      <p:sp>
+        <p:nvSpPr>
+          <p:cNvPr id="24" name="">
+            <a:extLst xmlns:a="http://schemas.openxmlformats.org/drawingml/2006/main">
+              <a:ext uri="{FF2B5EF4-FFF2-40B4-BE49-F238E27FC236}">
+                <a16:creationId xmlns:a16="http://schemas.microsoft.com/office/drawing/2014/main" id="{5EEC3B6F-7FE2-45C9-B489-DDF05F8E7981}"/>
+              </a:ext>
+            </a:extLst>
+          </p:cNvPr>
+          <p:cNvSpPr>
+            <a:spLocks xmlns:a="http://schemas.openxmlformats.org/drawingml/2006/main" noGrp="1"/>
+          </p:cNvSpPr>
+          <p:nvPr/>
+        </p:nvSpPr>
+        <p:spPr>
+          <a:xfrm xmlns:a="http://schemas.openxmlformats.org/drawingml/2006/main">
+            <a:off x="1162050" y="5019675"/>
+            <a:ext cx="400050" cy="400050"/>
+          </a:xfrm>
+          <a:prstGeom xmlns:a="http://schemas.openxmlformats.org/drawingml/2006/main" prst="rect">
+            <a:avLst/>
+          </a:prstGeom>
+          <a:noFill xmlns:a="http://schemas.openxmlformats.org/drawingml/2006/main"/>
+          <a:ln xmlns:a="http://schemas.openxmlformats.org/drawingml/2006/main" w="0">
+            <a:noFill/>
+          </a:ln>
+        </p:spPr>
+        <p:txBody>
+          <a:bodyPr xmlns:a="http://schemas.openxmlformats.org/drawingml/2006/main" anchor="ctr">
+            <a:normAutofit fontScale="100000"/>
+          </a:bodyPr>
+          <a:lstStyle xmlns:a="http://schemas.openxmlformats.org/drawingml/2006/main"/>
+          <a:p xmlns:a="http://schemas.openxmlformats.org/drawingml/2006/main">
+            <a:pPr algn="ctr">
+              <a:defRPr sz="1125" b="1">
                 <a:solidFill>
                   <a:srgbClr val="2F785D"/>
                 </a:solidFill>
                 <a:latin typeface="Arial"/>
                 <a:ea typeface="Arial"/>
                 <a:cs typeface="Arial"/>
+              </a:defRPr>
+            </a:pPr>
+            <a:r>
+              <a:rPr sz="1125" b="1">
+                <a:solidFill>
+                  <a:srgbClr val="2F785D"/>
+                </a:solidFill>
+                <a:latin typeface="Arial"/>
+                <a:ea typeface="Arial"/>
+                <a:cs typeface="Arial"/>
               </a:rPr>
-              <a:t>Check the result: Add the partial products and compare the answer with the estimate.</a:t>
+              <a:t>5</a:t>
+            </a:r>
+          </a:p>
+        </p:txBody>
+      </p:sp>
+      <p:sp>
+        <p:nvSpPr>
+          <p:cNvPr id="25" name="">
+            <a:extLst xmlns:a="http://schemas.openxmlformats.org/drawingml/2006/main">
+              <a:ext uri="{FF2B5EF4-FFF2-40B4-BE49-F238E27FC236}">
+                <a16:creationId xmlns:a16="http://schemas.microsoft.com/office/drawing/2014/main" id="{DAA8F957-7F57-4AF5-8396-74F10FD5DFEE}"/>
+              </a:ext>
+            </a:extLst>
+          </p:cNvPr>
+          <p:cNvSpPr>
+            <a:spLocks xmlns:a="http://schemas.openxmlformats.org/drawingml/2006/main" noGrp="1"/>
+          </p:cNvSpPr>
+          <p:nvPr/>
+        </p:nvSpPr>
+        <p:spPr>
+          <a:xfrm xmlns:a="http://schemas.openxmlformats.org/drawingml/2006/main">
+            <a:off x="1714500" y="4933950"/>
+            <a:ext cx="9525000" cy="638175"/>
+          </a:xfrm>
+          <a:prstGeom xmlns:a="http://schemas.openxmlformats.org/drawingml/2006/main" prst="rect">
+            <a:avLst/>
+          </a:prstGeom>
+          <a:noFill xmlns:a="http://schemas.openxmlformats.org/drawingml/2006/main"/>
+          <a:ln xmlns:a="http://schemas.openxmlformats.org/drawingml/2006/main" w="0">
+            <a:noFill/>
+          </a:ln>
+        </p:spPr>
+        <p:txBody>
+          <a:bodyPr xmlns:a="http://schemas.openxmlformats.org/drawingml/2006/main" anchor="ctr">
+            <a:normAutofit fontScale="100000"/>
+          </a:bodyPr>
+          <a:lstStyle xmlns:a="http://schemas.openxmlformats.org/drawingml/2006/main"/>
+          <a:p xmlns:a="http://schemas.openxmlformats.org/drawingml/2006/main">
+            <a:pPr algn="l">
+              <a:defRPr sz="1575" b="1">
+                <a:solidFill>
+                  <a:srgbClr val="2F785D"/>
+                </a:solidFill>
+                <a:latin typeface="Arial"/>
+                <a:ea typeface="Arial"/>
+                <a:cs typeface="Arial"/>
+              </a:defRPr>
+            </a:pPr>
+            <a:r>
+              <a:rPr sz="1575" b="1">
+                <a:solidFill>
+                  <a:srgbClr val="2F785D"/>
+                </a:solidFill>
+                <a:latin typeface="Arial"/>
+                <a:ea typeface="Arial"/>
+                <a:cs typeface="Arial"/>
+              </a:rPr>
+              <a:t>6 × 3 + 2 = 20 → 20,892</a:t>
             </a:r>
           </a:p>
         </p:txBody>
@@ -8841,7 +8995,7 @@
     </p:spTree>
     <p:extLst>
       <p:ext uri="{BB962C8B-B14F-4D97-AF65-F5344CB8AC3E}">
-        <p14:creationId xmlns:p14="http://schemas.microsoft.com/office/powerpoint/2010/main" val="842286472"/>
+        <p14:creationId xmlns:p14="http://schemas.microsoft.com/office/powerpoint/2010/main" val="826373842"/>
       </p:ext>
     </p:extLst>
   </p:cSld>
@@ -9078,6 +9232,51 @@
                       </p:childTnLst>
                     </p:cTn>
                   </p:par>
+                  <p:par>
+                    <p:cTn id="23" fill="hold">
+                      <p:stCondLst>
+                        <p:cond delay="indefinite"/>
+                      </p:stCondLst>
+                      <p:childTnLst>
+                        <p:par>
+                          <p:cTn id="24" fill="hold">
+                            <p:stCondLst>
+                              <p:cond delay="0"/>
+                            </p:stCondLst>
+                            <p:childTnLst>
+                              <p:par>
+                                <p:cTn id="25" presetID="1" presetClass="entr" presetSubtype="0" fill="hold" grpId="0" nodeType="clickEffect">
+                                  <p:stCondLst>
+                                    <p:cond delay="0"/>
+                                  </p:stCondLst>
+                                  <p:childTnLst>
+                                    <p:set>
+                                      <p:cBhvr>
+                                        <p:cTn id="26" dur="1" fill="hold">
+                                          <p:stCondLst>
+                                            <p:cond delay="0"/>
+                                          </p:stCondLst>
+                                        </p:cTn>
+                                        <p:tgtEl>
+                                          <p:spTgt spid="25"/>
+                                        </p:tgtEl>
+                                        <p:attrNameLst>
+                                          <p:attrName>style.visibility</p:attrName>
+                                        </p:attrNameLst>
+                                      </p:cBhvr>
+                                      <p:to>
+                                        <p:strVal val="visible"/>
+                                      </p:to>
+                                    </p:set>
+                                  </p:childTnLst>
+                                </p:cTn>
+                              </p:par>
+                            </p:childTnLst>
+                          </p:cTn>
+                        </p:par>
+                      </p:childTnLst>
+                    </p:cTn>
+                  </p:par>
                 </p:childTnLst>
               </p:cTn>
               <p:prevCondLst>
@@ -9105,6 +9304,7 @@
       <p:bldP spid="16" grpId="0"/>
       <p:bldP spid="19" grpId="0"/>
       <p:bldP spid="22" grpId="0"/>
+      <p:bldP spid="25" grpId="0"/>
     </p:bldLst>
   </p:timing>
 </p:sld>
@@ -9134,7 +9334,7 @@
           <p:cNvPr id="15" name="">
             <a:extLst xmlns:a="http://schemas.openxmlformats.org/drawingml/2006/main">
               <a:ext uri="{FF2B5EF4-FFF2-40B4-BE49-F238E27FC236}">
-                <a16:creationId xmlns:a16="http://schemas.microsoft.com/office/drawing/2014/main" id="{F5FA7A86-C6D3-4799-A07A-651D31E56C5D}"/>
+                <a16:creationId xmlns:a16="http://schemas.microsoft.com/office/drawing/2014/main" id="{5FD64455-7775-4A59-B517-C504DD1802E4}"/>
               </a:ext>
             </a:extLst>
           </p:cNvPr>
@@ -9166,7 +9366,7 @@
           <p:cNvPr id="2" name="">
             <a:extLst xmlns:a="http://schemas.openxmlformats.org/drawingml/2006/main">
               <a:ext uri="{FF2B5EF4-FFF2-40B4-BE49-F238E27FC236}">
-                <a16:creationId xmlns:a16="http://schemas.microsoft.com/office/drawing/2014/main" id="{F9E9AE95-0957-417D-98E3-85EA42D17CFE}"/>
+                <a16:creationId xmlns:a16="http://schemas.microsoft.com/office/drawing/2014/main" id="{84F34085-200C-4C3C-8C80-09A10F11016D}"/>
               </a:ext>
             </a:extLst>
           </p:cNvPr>
@@ -9223,7 +9423,7 @@
           <p:cNvPr id="3" name="">
             <a:extLst xmlns:a="http://schemas.openxmlformats.org/drawingml/2006/main">
               <a:ext uri="{FF2B5EF4-FFF2-40B4-BE49-F238E27FC236}">
-                <a16:creationId xmlns:a16="http://schemas.microsoft.com/office/drawing/2014/main" id="{D1781ED3-711F-4E8E-9146-8573A2F64E8A}"/>
+                <a16:creationId xmlns:a16="http://schemas.microsoft.com/office/drawing/2014/main" id="{6558A684-4BE0-43A9-8774-39982ADFCA2F}"/>
               </a:ext>
             </a:extLst>
           </p:cNvPr>
@@ -9255,7 +9455,7 @@
           <p:cNvPr id="4" name="">
             <a:extLst xmlns:a="http://schemas.openxmlformats.org/drawingml/2006/main">
               <a:ext uri="{FF2B5EF4-FFF2-40B4-BE49-F238E27FC236}">
-                <a16:creationId xmlns:a16="http://schemas.microsoft.com/office/drawing/2014/main" id="{51607462-2854-4361-8543-FF9295209360}"/>
+                <a16:creationId xmlns:a16="http://schemas.microsoft.com/office/drawing/2014/main" id="{0F3DC65D-800E-40F7-82A6-112DC8BB3903}"/>
               </a:ext>
             </a:extLst>
           </p:cNvPr>
@@ -9312,7 +9512,7 @@
           <p:cNvPr id="5" name="">
             <a:extLst xmlns:a="http://schemas.openxmlformats.org/drawingml/2006/main">
               <a:ext uri="{FF2B5EF4-FFF2-40B4-BE49-F238E27FC236}">
-                <a16:creationId xmlns:a16="http://schemas.microsoft.com/office/drawing/2014/main" id="{09439EEC-099F-4F2F-9BF7-A21EA9B76E76}"/>
+                <a16:creationId xmlns:a16="http://schemas.microsoft.com/office/drawing/2014/main" id="{E027441C-1371-434D-AC0C-F0495747D1D1}"/>
               </a:ext>
             </a:extLst>
           </p:cNvPr>
@@ -9369,7 +9569,7 @@
           <p:cNvPr id="6" name="">
             <a:extLst xmlns:a="http://schemas.openxmlformats.org/drawingml/2006/main">
               <a:ext uri="{FF2B5EF4-FFF2-40B4-BE49-F238E27FC236}">
-                <a16:creationId xmlns:a16="http://schemas.microsoft.com/office/drawing/2014/main" id="{4BC49A95-75A2-435D-9BC6-D857DDBDA499}"/>
+                <a16:creationId xmlns:a16="http://schemas.microsoft.com/office/drawing/2014/main" id="{8F5CECD3-D709-42E7-BC86-540CFBFB03D6}"/>
               </a:ext>
             </a:extLst>
           </p:cNvPr>
@@ -9426,7 +9626,7 @@
           <p:cNvPr id="7" name="">
             <a:extLst xmlns:a="http://schemas.openxmlformats.org/drawingml/2006/main">
               <a:ext uri="{FF2B5EF4-FFF2-40B4-BE49-F238E27FC236}">
-                <a16:creationId xmlns:a16="http://schemas.microsoft.com/office/drawing/2014/main" id="{911ADD8F-E404-4D22-90F4-FB081755A668}"/>
+                <a16:creationId xmlns:a16="http://schemas.microsoft.com/office/drawing/2014/main" id="{2FD7DF54-C3AD-4F54-A0DE-B56BEAB50E65}"/>
               </a:ext>
             </a:extLst>
           </p:cNvPr>
@@ -9458,7 +9658,7 @@
           <p:cNvPr id="8" name="">
             <a:extLst xmlns:a="http://schemas.openxmlformats.org/drawingml/2006/main">
               <a:ext uri="{FF2B5EF4-FFF2-40B4-BE49-F238E27FC236}">
-                <a16:creationId xmlns:a16="http://schemas.microsoft.com/office/drawing/2014/main" id="{B1DF60A5-627F-4543-8DE5-7434A8D7E409}"/>
+                <a16:creationId xmlns:a16="http://schemas.microsoft.com/office/drawing/2014/main" id="{A77DD7F2-5A7F-4327-B7D9-EEA11D99543C}"/>
               </a:ext>
             </a:extLst>
           </p:cNvPr>
@@ -9515,7 +9715,7 @@
           <p:cNvPr id="9" name="">
             <a:extLst xmlns:a="http://schemas.openxmlformats.org/drawingml/2006/main">
               <a:ext uri="{FF2B5EF4-FFF2-40B4-BE49-F238E27FC236}">
-                <a16:creationId xmlns:a16="http://schemas.microsoft.com/office/drawing/2014/main" id="{3B4672D4-F06B-4768-868C-0CF52AA1473F}"/>
+                <a16:creationId xmlns:a16="http://schemas.microsoft.com/office/drawing/2014/main" id="{2DE616CD-CEAA-4B48-B743-79454C26FF4B}"/>
               </a:ext>
             </a:extLst>
           </p:cNvPr>
@@ -9572,7 +9772,7 @@
           <p:cNvPr id="10" name="">
             <a:extLst xmlns:a="http://schemas.openxmlformats.org/drawingml/2006/main">
               <a:ext uri="{FF2B5EF4-FFF2-40B4-BE49-F238E27FC236}">
-                <a16:creationId xmlns:a16="http://schemas.microsoft.com/office/drawing/2014/main" id="{BF60A778-7AB0-4013-80D9-D439ECEFEF85}"/>
+                <a16:creationId xmlns:a16="http://schemas.microsoft.com/office/drawing/2014/main" id="{9B11CCA4-DBA8-4D02-9E63-9A01726CB4FF}"/>
               </a:ext>
             </a:extLst>
           </p:cNvPr>
@@ -9629,7 +9829,7 @@
           <p:cNvPr id="11" name="">
             <a:extLst xmlns:a="http://schemas.openxmlformats.org/drawingml/2006/main">
               <a:ext uri="{FF2B5EF4-FFF2-40B4-BE49-F238E27FC236}">
-                <a16:creationId xmlns:a16="http://schemas.microsoft.com/office/drawing/2014/main" id="{8CAEB9D0-0640-4C14-9584-A948C064DE4B}"/>
+                <a16:creationId xmlns:a16="http://schemas.microsoft.com/office/drawing/2014/main" id="{C0089F00-B1DC-4151-9234-9ED450F4464B}"/>
               </a:ext>
             </a:extLst>
           </p:cNvPr>
@@ -9686,7 +9886,7 @@
           <p:cNvPr id="12" name="">
             <a:extLst xmlns:a="http://schemas.openxmlformats.org/drawingml/2006/main">
               <a:ext uri="{FF2B5EF4-FFF2-40B4-BE49-F238E27FC236}">
-                <a16:creationId xmlns:a16="http://schemas.microsoft.com/office/drawing/2014/main" id="{74175EB7-120E-4C7B-AE07-C53E6E8FEF7C}"/>
+                <a16:creationId xmlns:a16="http://schemas.microsoft.com/office/drawing/2014/main" id="{4F1993A6-B69C-478B-B44B-6A5235ABFF6F}"/>
               </a:ext>
             </a:extLst>
           </p:cNvPr>
@@ -9718,7 +9918,7 @@
           <p:cNvPr id="13" name="">
             <a:extLst xmlns:a="http://schemas.openxmlformats.org/drawingml/2006/main">
               <a:ext uri="{FF2B5EF4-FFF2-40B4-BE49-F238E27FC236}">
-                <a16:creationId xmlns:a16="http://schemas.microsoft.com/office/drawing/2014/main" id="{01B3841D-5098-4702-B640-65E1F0BADC06}"/>
+                <a16:creationId xmlns:a16="http://schemas.microsoft.com/office/drawing/2014/main" id="{3CB6FC08-0197-4A80-B9C9-6520E048FFB5}"/>
               </a:ext>
             </a:extLst>
           </p:cNvPr>
@@ -9775,7 +9975,7 @@
           <p:cNvPr id="14" name="">
             <a:extLst xmlns:a="http://schemas.openxmlformats.org/drawingml/2006/main">
               <a:ext uri="{FF2B5EF4-FFF2-40B4-BE49-F238E27FC236}">
-                <a16:creationId xmlns:a16="http://schemas.microsoft.com/office/drawing/2014/main" id="{4BD3006D-9EEE-4470-AF7A-4EFD9837ECFD}"/>
+                <a16:creationId xmlns:a16="http://schemas.microsoft.com/office/drawing/2014/main" id="{E5183483-D488-4976-8E57-2669E01D9D12}"/>
               </a:ext>
             </a:extLst>
           </p:cNvPr>
@@ -9830,7 +10030,7 @@
     </p:spTree>
     <p:extLst>
       <p:ext uri="{BB962C8B-B14F-4D97-AF65-F5344CB8AC3E}">
-        <p14:creationId xmlns:p14="http://schemas.microsoft.com/office/powerpoint/2010/main" val="1134706352"/>
+        <p14:creationId xmlns:p14="http://schemas.microsoft.com/office/powerpoint/2010/main" val="2092448266"/>
       </p:ext>
     </p:extLst>
   </p:cSld>
@@ -10031,7 +10231,7 @@
           <p:cNvPr id="16" name="">
             <a:extLst xmlns:a="http://schemas.openxmlformats.org/drawingml/2006/main">
               <a:ext uri="{FF2B5EF4-FFF2-40B4-BE49-F238E27FC236}">
-                <a16:creationId xmlns:a16="http://schemas.microsoft.com/office/drawing/2014/main" id="{E4F108C6-F13E-4E71-A490-19C746CA7348}"/>
+                <a16:creationId xmlns:a16="http://schemas.microsoft.com/office/drawing/2014/main" id="{3DD21BE4-8482-46C8-A37F-3E1D1965B4F7}"/>
               </a:ext>
             </a:extLst>
           </p:cNvPr>
@@ -10063,7 +10263,7 @@
           <p:cNvPr id="2" name="">
             <a:extLst xmlns:a="http://schemas.openxmlformats.org/drawingml/2006/main">
               <a:ext uri="{FF2B5EF4-FFF2-40B4-BE49-F238E27FC236}">
-                <a16:creationId xmlns:a16="http://schemas.microsoft.com/office/drawing/2014/main" id="{81A2D829-088E-425A-81E3-F982A9304491}"/>
+                <a16:creationId xmlns:a16="http://schemas.microsoft.com/office/drawing/2014/main" id="{9691CE50-C6D4-4179-ACFD-2B8B5122247E}"/>
               </a:ext>
             </a:extLst>
           </p:cNvPr>
@@ -10120,7 +10320,7 @@
           <p:cNvPr id="3" name="">
             <a:extLst xmlns:a="http://schemas.openxmlformats.org/drawingml/2006/main">
               <a:ext uri="{FF2B5EF4-FFF2-40B4-BE49-F238E27FC236}">
-                <a16:creationId xmlns:a16="http://schemas.microsoft.com/office/drawing/2014/main" id="{689AF07B-831F-4F6D-83F3-C1C96C96CC53}"/>
+                <a16:creationId xmlns:a16="http://schemas.microsoft.com/office/drawing/2014/main" id="{2FB3AF76-348C-4700-BD86-8CDD1B645219}"/>
               </a:ext>
             </a:extLst>
           </p:cNvPr>
@@ -10152,7 +10352,7 @@
           <p:cNvPr id="4" name="">
             <a:extLst xmlns:a="http://schemas.openxmlformats.org/drawingml/2006/main">
               <a:ext uri="{FF2B5EF4-FFF2-40B4-BE49-F238E27FC236}">
-                <a16:creationId xmlns:a16="http://schemas.microsoft.com/office/drawing/2014/main" id="{EA840AC8-0CCC-4AC2-A64E-564C4674ED37}"/>
+                <a16:creationId xmlns:a16="http://schemas.microsoft.com/office/drawing/2014/main" id="{E2ABE458-FCED-4E61-8BD2-06E810499FF4}"/>
               </a:ext>
             </a:extLst>
           </p:cNvPr>
@@ -10209,7 +10409,7 @@
           <p:cNvPr id="5" name="">
             <a:extLst xmlns:a="http://schemas.openxmlformats.org/drawingml/2006/main">
               <a:ext uri="{FF2B5EF4-FFF2-40B4-BE49-F238E27FC236}">
-                <a16:creationId xmlns:a16="http://schemas.microsoft.com/office/drawing/2014/main" id="{A68AA9E3-4533-43E7-A3FF-0145B31BB932}"/>
+                <a16:creationId xmlns:a16="http://schemas.microsoft.com/office/drawing/2014/main" id="{AE5BA932-7998-4C15-BC2C-B69E1ACF71E7}"/>
               </a:ext>
             </a:extLst>
           </p:cNvPr>
@@ -10266,7 +10466,7 @@
           <p:cNvPr id="6" name="">
             <a:extLst xmlns:a="http://schemas.openxmlformats.org/drawingml/2006/main">
               <a:ext uri="{FF2B5EF4-FFF2-40B4-BE49-F238E27FC236}">
-                <a16:creationId xmlns:a16="http://schemas.microsoft.com/office/drawing/2014/main" id="{B869FFB9-5013-4FDD-88CE-E2F99CB0ABB9}"/>
+                <a16:creationId xmlns:a16="http://schemas.microsoft.com/office/drawing/2014/main" id="{111C7F31-4BA7-4F19-B98B-10FF55726388}"/>
               </a:ext>
             </a:extLst>
           </p:cNvPr>
@@ -10323,7 +10523,7 @@
           <p:cNvPr id="7" name="">
             <a:extLst xmlns:a="http://schemas.openxmlformats.org/drawingml/2006/main">
               <a:ext uri="{FF2B5EF4-FFF2-40B4-BE49-F238E27FC236}">
-                <a16:creationId xmlns:a16="http://schemas.microsoft.com/office/drawing/2014/main" id="{164CE4A3-D2EA-4CB4-B320-D9DA9F0AD738}"/>
+                <a16:creationId xmlns:a16="http://schemas.microsoft.com/office/drawing/2014/main" id="{D66D4EAA-220B-4706-AC09-B79D616D977C}"/>
               </a:ext>
             </a:extLst>
           </p:cNvPr>
@@ -10355,7 +10555,7 @@
           <p:cNvPr id="8" name="">
             <a:extLst xmlns:a="http://schemas.openxmlformats.org/drawingml/2006/main">
               <a:ext uri="{FF2B5EF4-FFF2-40B4-BE49-F238E27FC236}">
-                <a16:creationId xmlns:a16="http://schemas.microsoft.com/office/drawing/2014/main" id="{C1B1114E-6366-4F47-99D8-37193982ADD3}"/>
+                <a16:creationId xmlns:a16="http://schemas.microsoft.com/office/drawing/2014/main" id="{C18FBA5F-4211-4774-B5A5-3B6EB39AC7B8}"/>
               </a:ext>
             </a:extLst>
           </p:cNvPr>
@@ -10412,7 +10612,7 @@
           <p:cNvPr id="9" name="">
             <a:extLst xmlns:a="http://schemas.openxmlformats.org/drawingml/2006/main">
               <a:ext uri="{FF2B5EF4-FFF2-40B4-BE49-F238E27FC236}">
-                <a16:creationId xmlns:a16="http://schemas.microsoft.com/office/drawing/2014/main" id="{6D6165C2-BC25-4B4D-A2C9-D759DAF99DC5}"/>
+                <a16:creationId xmlns:a16="http://schemas.microsoft.com/office/drawing/2014/main" id="{43024E71-8896-42B8-BCE2-C24EDA4E0403}"/>
               </a:ext>
             </a:extLst>
           </p:cNvPr>
@@ -10469,7 +10669,7 @@
           <p:cNvPr id="10" name="">
             <a:extLst xmlns:a="http://schemas.openxmlformats.org/drawingml/2006/main">
               <a:ext uri="{FF2B5EF4-FFF2-40B4-BE49-F238E27FC236}">
-                <a16:creationId xmlns:a16="http://schemas.microsoft.com/office/drawing/2014/main" id="{61FF0802-7457-49F5-B370-4492496C9456}"/>
+                <a16:creationId xmlns:a16="http://schemas.microsoft.com/office/drawing/2014/main" id="{1559EBA8-F089-476F-8014-CD3B1D114D99}"/>
               </a:ext>
             </a:extLst>
           </p:cNvPr>
@@ -10526,7 +10726,7 @@
           <p:cNvPr id="11" name="">
             <a:extLst xmlns:a="http://schemas.openxmlformats.org/drawingml/2006/main">
               <a:ext uri="{FF2B5EF4-FFF2-40B4-BE49-F238E27FC236}">
-                <a16:creationId xmlns:a16="http://schemas.microsoft.com/office/drawing/2014/main" id="{BA15C7A4-4D91-4008-9B33-99D1EF0ECB88}"/>
+                <a16:creationId xmlns:a16="http://schemas.microsoft.com/office/drawing/2014/main" id="{F522D9B3-4997-4058-8BEF-BE0107278E18}"/>
               </a:ext>
             </a:extLst>
           </p:cNvPr>
@@ -10583,7 +10783,7 @@
           <p:cNvPr id="12" name="">
             <a:extLst xmlns:a="http://schemas.openxmlformats.org/drawingml/2006/main">
               <a:ext uri="{FF2B5EF4-FFF2-40B4-BE49-F238E27FC236}">
-                <a16:creationId xmlns:a16="http://schemas.microsoft.com/office/drawing/2014/main" id="{B4F928AF-E1EF-4883-A194-C44175BA53EE}"/>
+                <a16:creationId xmlns:a16="http://schemas.microsoft.com/office/drawing/2014/main" id="{1AA4096A-4288-4306-BA1E-44489CEE476C}"/>
               </a:ext>
             </a:extLst>
           </p:cNvPr>
@@ -10640,7 +10840,7 @@
           <p:cNvPr id="13" name="">
             <a:extLst xmlns:a="http://schemas.openxmlformats.org/drawingml/2006/main">
               <a:ext uri="{FF2B5EF4-FFF2-40B4-BE49-F238E27FC236}">
-                <a16:creationId xmlns:a16="http://schemas.microsoft.com/office/drawing/2014/main" id="{29647860-5810-40F3-AA5F-86F4F761F8DB}"/>
+                <a16:creationId xmlns:a16="http://schemas.microsoft.com/office/drawing/2014/main" id="{19940878-C0C6-4F14-A8B1-38BC826F8BFD}"/>
               </a:ext>
             </a:extLst>
           </p:cNvPr>
@@ -10697,7 +10897,7 @@
           <p:cNvPr id="14" name="">
             <a:extLst xmlns:a="http://schemas.openxmlformats.org/drawingml/2006/main">
               <a:ext uri="{FF2B5EF4-FFF2-40B4-BE49-F238E27FC236}">
-                <a16:creationId xmlns:a16="http://schemas.microsoft.com/office/drawing/2014/main" id="{21D1AF4B-F604-4E47-879C-ED4B06D4D36A}"/>
+                <a16:creationId xmlns:a16="http://schemas.microsoft.com/office/drawing/2014/main" id="{116FB929-6280-430F-B50F-D61D637594CF}"/>
               </a:ext>
             </a:extLst>
           </p:cNvPr>
@@ -10754,7 +10954,7 @@
           <p:cNvPr id="15" name="">
             <a:extLst xmlns:a="http://schemas.openxmlformats.org/drawingml/2006/main">
               <a:ext uri="{FF2B5EF4-FFF2-40B4-BE49-F238E27FC236}">
-                <a16:creationId xmlns:a16="http://schemas.microsoft.com/office/drawing/2014/main" id="{062BAB99-6244-4D20-BFD7-12679CF39714}"/>
+                <a16:creationId xmlns:a16="http://schemas.microsoft.com/office/drawing/2014/main" id="{BAA77E2E-1371-427F-A6F4-D681D9839E84}"/>
               </a:ext>
             </a:extLst>
           </p:cNvPr>
@@ -10809,7 +11009,7 @@
     </p:spTree>
     <p:extLst>
       <p:ext uri="{BB962C8B-B14F-4D97-AF65-F5344CB8AC3E}">
-        <p14:creationId xmlns:p14="http://schemas.microsoft.com/office/powerpoint/2010/main" val="1414435403"/>
+        <p14:creationId xmlns:p14="http://schemas.microsoft.com/office/powerpoint/2010/main" val="625091537"/>
       </p:ext>
     </p:extLst>
   </p:cSld>
@@ -10964,7 +11164,7 @@
           <p:cNvPr id="16" name="">
             <a:extLst xmlns:a="http://schemas.openxmlformats.org/drawingml/2006/main">
               <a:ext uri="{FF2B5EF4-FFF2-40B4-BE49-F238E27FC236}">
-                <a16:creationId xmlns:a16="http://schemas.microsoft.com/office/drawing/2014/main" id="{5EFF5DA6-3748-474D-B324-66D5A9293235}"/>
+                <a16:creationId xmlns:a16="http://schemas.microsoft.com/office/drawing/2014/main" id="{748889C1-35A2-4656-854B-35978B2AC18B}"/>
               </a:ext>
             </a:extLst>
           </p:cNvPr>
@@ -10996,7 +11196,7 @@
           <p:cNvPr id="2" name="">
             <a:extLst xmlns:a="http://schemas.openxmlformats.org/drawingml/2006/main">
               <a:ext uri="{FF2B5EF4-FFF2-40B4-BE49-F238E27FC236}">
-                <a16:creationId xmlns:a16="http://schemas.microsoft.com/office/drawing/2014/main" id="{66B26AF0-D578-4DE9-9741-F2A0A9811302}"/>
+                <a16:creationId xmlns:a16="http://schemas.microsoft.com/office/drawing/2014/main" id="{14E40CB5-5BE6-4BDE-81DC-E4519408CE88}"/>
               </a:ext>
             </a:extLst>
           </p:cNvPr>
@@ -11053,7 +11253,7 @@
           <p:cNvPr id="3" name="">
             <a:extLst xmlns:a="http://schemas.openxmlformats.org/drawingml/2006/main">
               <a:ext uri="{FF2B5EF4-FFF2-40B4-BE49-F238E27FC236}">
-                <a16:creationId xmlns:a16="http://schemas.microsoft.com/office/drawing/2014/main" id="{7E02C890-4552-46DA-AD2C-2DEEF261E804}"/>
+                <a16:creationId xmlns:a16="http://schemas.microsoft.com/office/drawing/2014/main" id="{C447D085-BEE5-4F02-98DF-F7765FE71E30}"/>
               </a:ext>
             </a:extLst>
           </p:cNvPr>
@@ -11085,7 +11285,7 @@
           <p:cNvPr id="4" name="">
             <a:extLst xmlns:a="http://schemas.openxmlformats.org/drawingml/2006/main">
               <a:ext uri="{FF2B5EF4-FFF2-40B4-BE49-F238E27FC236}">
-                <a16:creationId xmlns:a16="http://schemas.microsoft.com/office/drawing/2014/main" id="{37197E49-1EAB-4870-8505-6B4699DA54E6}"/>
+                <a16:creationId xmlns:a16="http://schemas.microsoft.com/office/drawing/2014/main" id="{F54B5266-B18B-43FF-9650-F025B6BD6C4D}"/>
               </a:ext>
             </a:extLst>
           </p:cNvPr>
@@ -11142,7 +11342,7 @@
           <p:cNvPr id="5" name="">
             <a:extLst xmlns:a="http://schemas.openxmlformats.org/drawingml/2006/main">
               <a:ext uri="{FF2B5EF4-FFF2-40B4-BE49-F238E27FC236}">
-                <a16:creationId xmlns:a16="http://schemas.microsoft.com/office/drawing/2014/main" id="{BB7B49DD-3C57-42C4-B126-00F719C2AC03}"/>
+                <a16:creationId xmlns:a16="http://schemas.microsoft.com/office/drawing/2014/main" id="{3E6DB9E8-F387-4728-BF33-888648109DB0}"/>
               </a:ext>
             </a:extLst>
           </p:cNvPr>
@@ -11199,7 +11399,7 @@
           <p:cNvPr id="6" name="">
             <a:extLst xmlns:a="http://schemas.openxmlformats.org/drawingml/2006/main">
               <a:ext uri="{FF2B5EF4-FFF2-40B4-BE49-F238E27FC236}">
-                <a16:creationId xmlns:a16="http://schemas.microsoft.com/office/drawing/2014/main" id="{BB7656BB-47EB-446A-8D10-263A63BC855E}"/>
+                <a16:creationId xmlns:a16="http://schemas.microsoft.com/office/drawing/2014/main" id="{008F5D4B-B498-4EE0-93BF-A42273D1EA84}"/>
               </a:ext>
             </a:extLst>
           </p:cNvPr>
@@ -11256,7 +11456,7 @@
           <p:cNvPr id="7" name="">
             <a:extLst xmlns:a="http://schemas.openxmlformats.org/drawingml/2006/main">
               <a:ext uri="{FF2B5EF4-FFF2-40B4-BE49-F238E27FC236}">
-                <a16:creationId xmlns:a16="http://schemas.microsoft.com/office/drawing/2014/main" id="{CA8EADFC-1E23-455B-94A8-A55F6C38AECC}"/>
+                <a16:creationId xmlns:a16="http://schemas.microsoft.com/office/drawing/2014/main" id="{1AB4FAD6-1B61-4938-A62A-757DD4A0005A}"/>
               </a:ext>
             </a:extLst>
           </p:cNvPr>
@@ -11288,7 +11488,7 @@
           <p:cNvPr id="8" name="">
             <a:extLst xmlns:a="http://schemas.openxmlformats.org/drawingml/2006/main">
               <a:ext uri="{FF2B5EF4-FFF2-40B4-BE49-F238E27FC236}">
-                <a16:creationId xmlns:a16="http://schemas.microsoft.com/office/drawing/2014/main" id="{C967F49C-D780-4CBC-980B-E8337C1A6675}"/>
+                <a16:creationId xmlns:a16="http://schemas.microsoft.com/office/drawing/2014/main" id="{A526912F-3A2C-4CEC-9F5E-38514A7CDD60}"/>
               </a:ext>
             </a:extLst>
           </p:cNvPr>
@@ -11345,7 +11545,7 @@
           <p:cNvPr id="9" name="">
             <a:extLst xmlns:a="http://schemas.openxmlformats.org/drawingml/2006/main">
               <a:ext uri="{FF2B5EF4-FFF2-40B4-BE49-F238E27FC236}">
-                <a16:creationId xmlns:a16="http://schemas.microsoft.com/office/drawing/2014/main" id="{75E3C8BD-EE73-4927-9BCC-103A2388D443}"/>
+                <a16:creationId xmlns:a16="http://schemas.microsoft.com/office/drawing/2014/main" id="{52A46EF7-451F-416E-8D83-90894F71E65C}"/>
               </a:ext>
             </a:extLst>
           </p:cNvPr>
@@ -11406,7 +11606,7 @@
           <p:nvPr/>
         </p:nvPicPr>
         <p:blipFill>
-          <a:blip xmlns:r="http://schemas.openxmlformats.org/officeDocument/2006/relationships" xmlns:a="http://schemas.openxmlformats.org/drawingml/2006/main" r:embed="Ra7d4eff92ef94916"/>
+          <a:blip xmlns:r="http://schemas.openxmlformats.org/officeDocument/2006/relationships" xmlns:a="http://schemas.openxmlformats.org/drawingml/2006/main" r:embed="R28001c9798254b3a"/>
           <a:stretch xmlns:a="http://schemas.openxmlformats.org/drawingml/2006/main"/>
         </p:blipFill>
         <p:spPr>
@@ -11424,7 +11624,7 @@
           <p:cNvPr id="11" name="">
             <a:extLst xmlns:a="http://schemas.openxmlformats.org/drawingml/2006/main">
               <a:ext uri="{FF2B5EF4-FFF2-40B4-BE49-F238E27FC236}">
-                <a16:creationId xmlns:a16="http://schemas.microsoft.com/office/drawing/2014/main" id="{D0B8674D-21BF-4129-B008-F2E81397157C}"/>
+                <a16:creationId xmlns:a16="http://schemas.microsoft.com/office/drawing/2014/main" id="{C2874A17-DB63-4ADF-9AE1-C3617945AB4A}"/>
               </a:ext>
             </a:extLst>
           </p:cNvPr>
@@ -11481,7 +11681,7 @@
           <p:cNvPr id="12" name="">
             <a:extLst xmlns:a="http://schemas.openxmlformats.org/drawingml/2006/main">
               <a:ext uri="{FF2B5EF4-FFF2-40B4-BE49-F238E27FC236}">
-                <a16:creationId xmlns:a16="http://schemas.microsoft.com/office/drawing/2014/main" id="{D20E067A-6494-47E0-B66C-F944AEB87B2F}"/>
+                <a16:creationId xmlns:a16="http://schemas.microsoft.com/office/drawing/2014/main" id="{92F1185E-5FD6-446A-AED0-6D3F2EF8E2BE}"/>
               </a:ext>
             </a:extLst>
           </p:cNvPr>
@@ -11538,7 +11738,7 @@
           <p:cNvPr id="13" name="">
             <a:extLst xmlns:a="http://schemas.openxmlformats.org/drawingml/2006/main">
               <a:ext uri="{FF2B5EF4-FFF2-40B4-BE49-F238E27FC236}">
-                <a16:creationId xmlns:a16="http://schemas.microsoft.com/office/drawing/2014/main" id="{CB67E7B2-D238-4400-B726-9258B868DF4C}"/>
+                <a16:creationId xmlns:a16="http://schemas.microsoft.com/office/drawing/2014/main" id="{9078E492-6BF9-4CAE-B5DA-45C9016F3253}"/>
               </a:ext>
             </a:extLst>
           </p:cNvPr>
@@ -11570,7 +11770,7 @@
           <p:cNvPr id="14" name="">
             <a:extLst xmlns:a="http://schemas.openxmlformats.org/drawingml/2006/main">
               <a:ext uri="{FF2B5EF4-FFF2-40B4-BE49-F238E27FC236}">
-                <a16:creationId xmlns:a16="http://schemas.microsoft.com/office/drawing/2014/main" id="{882EFC2C-7917-4DBE-B1C1-2A75AF5BB354}"/>
+                <a16:creationId xmlns:a16="http://schemas.microsoft.com/office/drawing/2014/main" id="{8A04B478-D17E-4568-826A-C68787C88190}"/>
               </a:ext>
             </a:extLst>
           </p:cNvPr>
@@ -11627,7 +11827,7 @@
           <p:cNvPr id="15" name="">
             <a:extLst xmlns:a="http://schemas.openxmlformats.org/drawingml/2006/main">
               <a:ext uri="{FF2B5EF4-FFF2-40B4-BE49-F238E27FC236}">
-                <a16:creationId xmlns:a16="http://schemas.microsoft.com/office/drawing/2014/main" id="{70281B74-A642-469D-A484-96E4C124C0F3}"/>
+                <a16:creationId xmlns:a16="http://schemas.microsoft.com/office/drawing/2014/main" id="{4331AD21-120F-40FC-B303-AA569A1A4571}"/>
               </a:ext>
             </a:extLst>
           </p:cNvPr>
@@ -11682,7 +11882,7 @@
     </p:spTree>
     <p:extLst>
       <p:ext uri="{BB962C8B-B14F-4D97-AF65-F5344CB8AC3E}">
-        <p14:creationId xmlns:p14="http://schemas.microsoft.com/office/powerpoint/2010/main" val="961100380"/>
+        <p14:creationId xmlns:p14="http://schemas.microsoft.com/office/powerpoint/2010/main" val="2122385229"/>
       </p:ext>
     </p:extLst>
   </p:cSld>
@@ -11837,7 +12037,7 @@
           <p:cNvPr id="23" name="">
             <a:extLst xmlns:a="http://schemas.openxmlformats.org/drawingml/2006/main">
               <a:ext uri="{FF2B5EF4-FFF2-40B4-BE49-F238E27FC236}">
-                <a16:creationId xmlns:a16="http://schemas.microsoft.com/office/drawing/2014/main" id="{4A6BAD58-87CB-4D8C-8934-B3D2E5F049AB}"/>
+                <a16:creationId xmlns:a16="http://schemas.microsoft.com/office/drawing/2014/main" id="{B4A89B03-5488-4F89-9962-AC01B2A4D0AA}"/>
               </a:ext>
             </a:extLst>
           </p:cNvPr>
@@ -11869,7 +12069,7 @@
           <p:cNvPr id="2" name="">
             <a:extLst xmlns:a="http://schemas.openxmlformats.org/drawingml/2006/main">
               <a:ext uri="{FF2B5EF4-FFF2-40B4-BE49-F238E27FC236}">
-                <a16:creationId xmlns:a16="http://schemas.microsoft.com/office/drawing/2014/main" id="{90751149-E687-4973-BC1B-32D24F9DFD8C}"/>
+                <a16:creationId xmlns:a16="http://schemas.microsoft.com/office/drawing/2014/main" id="{03592628-7F1A-45A6-89F9-D638BFA1E84A}"/>
               </a:ext>
             </a:extLst>
           </p:cNvPr>
@@ -11926,7 +12126,7 @@
           <p:cNvPr id="3" name="">
             <a:extLst xmlns:a="http://schemas.openxmlformats.org/drawingml/2006/main">
               <a:ext uri="{FF2B5EF4-FFF2-40B4-BE49-F238E27FC236}">
-                <a16:creationId xmlns:a16="http://schemas.microsoft.com/office/drawing/2014/main" id="{5F8638B2-72BC-4DED-A846-F92958EE0CB3}"/>
+                <a16:creationId xmlns:a16="http://schemas.microsoft.com/office/drawing/2014/main" id="{342756F7-2C1D-48C5-AC88-4A29657055D9}"/>
               </a:ext>
             </a:extLst>
           </p:cNvPr>
@@ -11958,7 +12158,7 @@
           <p:cNvPr id="4" name="">
             <a:extLst xmlns:a="http://schemas.openxmlformats.org/drawingml/2006/main">
               <a:ext uri="{FF2B5EF4-FFF2-40B4-BE49-F238E27FC236}">
-                <a16:creationId xmlns:a16="http://schemas.microsoft.com/office/drawing/2014/main" id="{E94E20B6-B996-463E-9A00-700F64E8C81A}"/>
+                <a16:creationId xmlns:a16="http://schemas.microsoft.com/office/drawing/2014/main" id="{BB6C7B4D-D96D-4403-A282-CC769CDB197A}"/>
               </a:ext>
             </a:extLst>
           </p:cNvPr>
@@ -12015,7 +12215,7 @@
           <p:cNvPr id="5" name="">
             <a:extLst xmlns:a="http://schemas.openxmlformats.org/drawingml/2006/main">
               <a:ext uri="{FF2B5EF4-FFF2-40B4-BE49-F238E27FC236}">
-                <a16:creationId xmlns:a16="http://schemas.microsoft.com/office/drawing/2014/main" id="{9BE8BDE4-BA94-4249-A5F5-9932F6EFBBBE}"/>
+                <a16:creationId xmlns:a16="http://schemas.microsoft.com/office/drawing/2014/main" id="{FCE9E323-6261-430E-9C05-A50E86DFDFD1}"/>
               </a:ext>
             </a:extLst>
           </p:cNvPr>
@@ -12072,7 +12272,7 @@
           <p:cNvPr id="6" name="">
             <a:extLst xmlns:a="http://schemas.openxmlformats.org/drawingml/2006/main">
               <a:ext uri="{FF2B5EF4-FFF2-40B4-BE49-F238E27FC236}">
-                <a16:creationId xmlns:a16="http://schemas.microsoft.com/office/drawing/2014/main" id="{574C9C3A-261D-404A-BDDD-73EA8B0FD98A}"/>
+                <a16:creationId xmlns:a16="http://schemas.microsoft.com/office/drawing/2014/main" id="{C812D59C-82FC-4610-BDAB-2CB98781B1C7}"/>
               </a:ext>
             </a:extLst>
           </p:cNvPr>
@@ -12129,7 +12329,7 @@
           <p:cNvPr id="7" name="">
             <a:extLst xmlns:a="http://schemas.openxmlformats.org/drawingml/2006/main">
               <a:ext uri="{FF2B5EF4-FFF2-40B4-BE49-F238E27FC236}">
-                <a16:creationId xmlns:a16="http://schemas.microsoft.com/office/drawing/2014/main" id="{ED4F2B62-870A-4525-9C7D-C116EFB504E2}"/>
+                <a16:creationId xmlns:a16="http://schemas.microsoft.com/office/drawing/2014/main" id="{F2902D2F-0351-4BED-A2FF-BB02379BEF7B}"/>
               </a:ext>
             </a:extLst>
           </p:cNvPr>
@@ -12161,7 +12361,7 @@
           <p:cNvPr id="8" name="">
             <a:extLst xmlns:a="http://schemas.openxmlformats.org/drawingml/2006/main">
               <a:ext uri="{FF2B5EF4-FFF2-40B4-BE49-F238E27FC236}">
-                <a16:creationId xmlns:a16="http://schemas.microsoft.com/office/drawing/2014/main" id="{81372942-C13A-47A8-B2E3-CD8819838A6F}"/>
+                <a16:creationId xmlns:a16="http://schemas.microsoft.com/office/drawing/2014/main" id="{2A4BF0CC-FBED-4C65-A325-6A4BA9B85D77}"/>
               </a:ext>
             </a:extLst>
           </p:cNvPr>
@@ -12218,7 +12418,7 @@
           <p:cNvPr id="9" name="">
             <a:extLst xmlns:a="http://schemas.openxmlformats.org/drawingml/2006/main">
               <a:ext uri="{FF2B5EF4-FFF2-40B4-BE49-F238E27FC236}">
-                <a16:creationId xmlns:a16="http://schemas.microsoft.com/office/drawing/2014/main" id="{90F67C79-DD8E-46A1-A0AB-F761CF5622DB}"/>
+                <a16:creationId xmlns:a16="http://schemas.microsoft.com/office/drawing/2014/main" id="{1E13163D-EEDF-4EE4-85FA-883A8E53D5D6}"/>
               </a:ext>
             </a:extLst>
           </p:cNvPr>
@@ -12275,7 +12475,7 @@
           <p:cNvPr id="10" name="">
             <a:extLst xmlns:a="http://schemas.openxmlformats.org/drawingml/2006/main">
               <a:ext uri="{FF2B5EF4-FFF2-40B4-BE49-F238E27FC236}">
-                <a16:creationId xmlns:a16="http://schemas.microsoft.com/office/drawing/2014/main" id="{837C0568-2743-4E66-8076-77F3B392A6F6}"/>
+                <a16:creationId xmlns:a16="http://schemas.microsoft.com/office/drawing/2014/main" id="{587BA2E4-B0F5-4416-A422-596016FFAB02}"/>
               </a:ext>
             </a:extLst>
           </p:cNvPr>
@@ -12309,7 +12509,7 @@
           <p:cNvPr id="11" name="">
             <a:extLst xmlns:a="http://schemas.openxmlformats.org/drawingml/2006/main">
               <a:ext uri="{FF2B5EF4-FFF2-40B4-BE49-F238E27FC236}">
-                <a16:creationId xmlns:a16="http://schemas.microsoft.com/office/drawing/2014/main" id="{39615FA9-D16B-4315-BDA9-39AFF635D3FB}"/>
+                <a16:creationId xmlns:a16="http://schemas.microsoft.com/office/drawing/2014/main" id="{812BFB07-FC74-460F-8843-5A524AA1B7AA}"/>
               </a:ext>
             </a:extLst>
           </p:cNvPr>
@@ -12341,7 +12541,7 @@
           <p:cNvPr id="12" name="">
             <a:extLst xmlns:a="http://schemas.openxmlformats.org/drawingml/2006/main">
               <a:ext uri="{FF2B5EF4-FFF2-40B4-BE49-F238E27FC236}">
-                <a16:creationId xmlns:a16="http://schemas.microsoft.com/office/drawing/2014/main" id="{1353741A-AF5C-42EA-916C-09948928BD6A}"/>
+                <a16:creationId xmlns:a16="http://schemas.microsoft.com/office/drawing/2014/main" id="{E188E7AD-4085-4C5F-BC9A-1A1929307467}"/>
               </a:ext>
             </a:extLst>
           </p:cNvPr>
@@ -12398,7 +12598,7 @@
           <p:cNvPr id="13" name="">
             <a:extLst xmlns:a="http://schemas.openxmlformats.org/drawingml/2006/main">
               <a:ext uri="{FF2B5EF4-FFF2-40B4-BE49-F238E27FC236}">
-                <a16:creationId xmlns:a16="http://schemas.microsoft.com/office/drawing/2014/main" id="{A35C679C-1323-42C2-B5D1-FC7E178ABF55}"/>
+                <a16:creationId xmlns:a16="http://schemas.microsoft.com/office/drawing/2014/main" id="{3ED8E742-2389-4AEA-9F4B-BAD096A26234}"/>
               </a:ext>
             </a:extLst>
           </p:cNvPr>
@@ -12455,7 +12655,7 @@
           <p:cNvPr id="14" name="">
             <a:extLst xmlns:a="http://schemas.openxmlformats.org/drawingml/2006/main">
               <a:ext uri="{FF2B5EF4-FFF2-40B4-BE49-F238E27FC236}">
-                <a16:creationId xmlns:a16="http://schemas.microsoft.com/office/drawing/2014/main" id="{C4587EAA-A8ED-4CC0-94A5-75357425BFED}"/>
+                <a16:creationId xmlns:a16="http://schemas.microsoft.com/office/drawing/2014/main" id="{3AEE9F7C-3631-49C2-863E-B3662BDE3DFC}"/>
               </a:ext>
             </a:extLst>
           </p:cNvPr>
@@ -12489,7 +12689,7 @@
           <p:cNvPr id="15" name="">
             <a:extLst xmlns:a="http://schemas.openxmlformats.org/drawingml/2006/main">
               <a:ext uri="{FF2B5EF4-FFF2-40B4-BE49-F238E27FC236}">
-                <a16:creationId xmlns:a16="http://schemas.microsoft.com/office/drawing/2014/main" id="{5F5B70B3-0EC0-4674-8161-48F7E0B9AE5E}"/>
+                <a16:creationId xmlns:a16="http://schemas.microsoft.com/office/drawing/2014/main" id="{9EFE0DEC-EB81-4011-9BE0-33C3CF8EA2A1}"/>
               </a:ext>
             </a:extLst>
           </p:cNvPr>
@@ -12521,7 +12721,7 @@
           <p:cNvPr id="16" name="">
             <a:extLst xmlns:a="http://schemas.openxmlformats.org/drawingml/2006/main">
               <a:ext uri="{FF2B5EF4-FFF2-40B4-BE49-F238E27FC236}">
-                <a16:creationId xmlns:a16="http://schemas.microsoft.com/office/drawing/2014/main" id="{E625C470-7708-4A71-8D83-BF7126766595}"/>
+                <a16:creationId xmlns:a16="http://schemas.microsoft.com/office/drawing/2014/main" id="{2A852BA3-E26E-468C-A50C-293D2FC75D46}"/>
               </a:ext>
             </a:extLst>
           </p:cNvPr>
@@ -12578,7 +12778,7 @@
           <p:cNvPr id="17" name="">
             <a:extLst xmlns:a="http://schemas.openxmlformats.org/drawingml/2006/main">
               <a:ext uri="{FF2B5EF4-FFF2-40B4-BE49-F238E27FC236}">
-                <a16:creationId xmlns:a16="http://schemas.microsoft.com/office/drawing/2014/main" id="{0F30F94C-3787-4DBB-BAA6-CF24EF4D0705}"/>
+                <a16:creationId xmlns:a16="http://schemas.microsoft.com/office/drawing/2014/main" id="{56251EC9-734A-46D3-A4E8-3C0E4AFE3400}"/>
               </a:ext>
             </a:extLst>
           </p:cNvPr>
@@ -12635,7 +12835,7 @@
           <p:cNvPr id="18" name="">
             <a:extLst xmlns:a="http://schemas.openxmlformats.org/drawingml/2006/main">
               <a:ext uri="{FF2B5EF4-FFF2-40B4-BE49-F238E27FC236}">
-                <a16:creationId xmlns:a16="http://schemas.microsoft.com/office/drawing/2014/main" id="{518636DD-DFF1-41E3-B102-2FD8B320D28F}"/>
+                <a16:creationId xmlns:a16="http://schemas.microsoft.com/office/drawing/2014/main" id="{E5BD7A4D-6417-48E4-B674-099D2EC58A03}"/>
               </a:ext>
             </a:extLst>
           </p:cNvPr>
@@ -12669,7 +12869,7 @@
           <p:cNvPr id="19" name="">
             <a:extLst xmlns:a="http://schemas.openxmlformats.org/drawingml/2006/main">
               <a:ext uri="{FF2B5EF4-FFF2-40B4-BE49-F238E27FC236}">
-                <a16:creationId xmlns:a16="http://schemas.microsoft.com/office/drawing/2014/main" id="{ABB9A8F3-ACAA-471F-B9C2-971C9DD0A2E4}"/>
+                <a16:creationId xmlns:a16="http://schemas.microsoft.com/office/drawing/2014/main" id="{7271520E-9988-4BD3-87F1-175CFF779279}"/>
               </a:ext>
             </a:extLst>
           </p:cNvPr>
@@ -12701,7 +12901,7 @@
           <p:cNvPr id="20" name="">
             <a:extLst xmlns:a="http://schemas.openxmlformats.org/drawingml/2006/main">
               <a:ext uri="{FF2B5EF4-FFF2-40B4-BE49-F238E27FC236}">
-                <a16:creationId xmlns:a16="http://schemas.microsoft.com/office/drawing/2014/main" id="{68F8A169-9AFA-450C-9E23-F191A8A9BBAB}"/>
+                <a16:creationId xmlns:a16="http://schemas.microsoft.com/office/drawing/2014/main" id="{93539B9C-DA05-49DF-881B-EE914C825534}"/>
               </a:ext>
             </a:extLst>
           </p:cNvPr>
@@ -12758,7 +12958,7 @@
           <p:cNvPr id="21" name="">
             <a:extLst xmlns:a="http://schemas.openxmlformats.org/drawingml/2006/main">
               <a:ext uri="{FF2B5EF4-FFF2-40B4-BE49-F238E27FC236}">
-                <a16:creationId xmlns:a16="http://schemas.microsoft.com/office/drawing/2014/main" id="{E63ED4C6-E2AF-43A0-96DE-5E4FA8F244D4}"/>
+                <a16:creationId xmlns:a16="http://schemas.microsoft.com/office/drawing/2014/main" id="{B3EBE438-3CD1-40BA-B196-E72B521E0957}"/>
               </a:ext>
             </a:extLst>
           </p:cNvPr>
@@ -12815,7 +13015,7 @@
           <p:cNvPr id="22" name="">
             <a:extLst xmlns:a="http://schemas.openxmlformats.org/drawingml/2006/main">
               <a:ext uri="{FF2B5EF4-FFF2-40B4-BE49-F238E27FC236}">
-                <a16:creationId xmlns:a16="http://schemas.microsoft.com/office/drawing/2014/main" id="{64FA629D-CA95-4790-92F5-220CACEDB101}"/>
+                <a16:creationId xmlns:a16="http://schemas.microsoft.com/office/drawing/2014/main" id="{F93C2D8D-167D-4CC1-9680-ED61CB60B6CB}"/>
               </a:ext>
             </a:extLst>
           </p:cNvPr>
@@ -12870,7 +13070,7 @@
     </p:spTree>
     <p:extLst>
       <p:ext uri="{BB962C8B-B14F-4D97-AF65-F5344CB8AC3E}">
-        <p14:creationId xmlns:p14="http://schemas.microsoft.com/office/powerpoint/2010/main" val="535016421"/>
+        <p14:creationId xmlns:p14="http://schemas.microsoft.com/office/powerpoint/2010/main" val="1854294633"/>
       </p:ext>
     </p:extLst>
   </p:cSld>
@@ -13071,7 +13271,7 @@
           <p:cNvPr id="22" name="">
             <a:extLst xmlns:a="http://schemas.openxmlformats.org/drawingml/2006/main">
               <a:ext uri="{FF2B5EF4-FFF2-40B4-BE49-F238E27FC236}">
-                <a16:creationId xmlns:a16="http://schemas.microsoft.com/office/drawing/2014/main" id="{802B00E3-B585-489B-A1DE-4B0408F2D4C6}"/>
+                <a16:creationId xmlns:a16="http://schemas.microsoft.com/office/drawing/2014/main" id="{D5DFDBD5-D9C4-4C62-AD92-5DA824D70028}"/>
               </a:ext>
             </a:extLst>
           </p:cNvPr>
@@ -13103,7 +13303,7 @@
           <p:cNvPr id="2" name="">
             <a:extLst xmlns:a="http://schemas.openxmlformats.org/drawingml/2006/main">
               <a:ext uri="{FF2B5EF4-FFF2-40B4-BE49-F238E27FC236}">
-                <a16:creationId xmlns:a16="http://schemas.microsoft.com/office/drawing/2014/main" id="{1950701C-015C-4BB7-85AB-00D2420645E0}"/>
+                <a16:creationId xmlns:a16="http://schemas.microsoft.com/office/drawing/2014/main" id="{785CCDE5-8D58-439A-AC71-F8C4215D36A0}"/>
               </a:ext>
             </a:extLst>
           </p:cNvPr>
@@ -13160,7 +13360,7 @@
           <p:cNvPr id="3" name="">
             <a:extLst xmlns:a="http://schemas.openxmlformats.org/drawingml/2006/main">
               <a:ext uri="{FF2B5EF4-FFF2-40B4-BE49-F238E27FC236}">
-                <a16:creationId xmlns:a16="http://schemas.microsoft.com/office/drawing/2014/main" id="{9EAF6540-F89F-47A2-93BD-8DA9FEBDB5EF}"/>
+                <a16:creationId xmlns:a16="http://schemas.microsoft.com/office/drawing/2014/main" id="{9799352C-8B20-46B9-B067-FEC949EF4056}"/>
               </a:ext>
             </a:extLst>
           </p:cNvPr>
@@ -13192,7 +13392,7 @@
           <p:cNvPr id="4" name="">
             <a:extLst xmlns:a="http://schemas.openxmlformats.org/drawingml/2006/main">
               <a:ext uri="{FF2B5EF4-FFF2-40B4-BE49-F238E27FC236}">
-                <a16:creationId xmlns:a16="http://schemas.microsoft.com/office/drawing/2014/main" id="{009A27A4-18A9-4B01-A005-CB59F9E3AA81}"/>
+                <a16:creationId xmlns:a16="http://schemas.microsoft.com/office/drawing/2014/main" id="{DD6F04E2-0796-401F-9549-151756C258B4}"/>
               </a:ext>
             </a:extLst>
           </p:cNvPr>
@@ -13249,7 +13449,7 @@
           <p:cNvPr id="5" name="">
             <a:extLst xmlns:a="http://schemas.openxmlformats.org/drawingml/2006/main">
               <a:ext uri="{FF2B5EF4-FFF2-40B4-BE49-F238E27FC236}">
-                <a16:creationId xmlns:a16="http://schemas.microsoft.com/office/drawing/2014/main" id="{0D5AF12A-9BF9-4F05-96C3-851A743EB435}"/>
+                <a16:creationId xmlns:a16="http://schemas.microsoft.com/office/drawing/2014/main" id="{3DFC50F7-75DC-4D16-A8CB-E7F86C08399C}"/>
               </a:ext>
             </a:extLst>
           </p:cNvPr>
@@ -13306,7 +13506,7 @@
           <p:cNvPr id="6" name="">
             <a:extLst xmlns:a="http://schemas.openxmlformats.org/drawingml/2006/main">
               <a:ext uri="{FF2B5EF4-FFF2-40B4-BE49-F238E27FC236}">
-                <a16:creationId xmlns:a16="http://schemas.microsoft.com/office/drawing/2014/main" id="{4E945EC9-47FA-491E-9349-F7BCBBC40034}"/>
+                <a16:creationId xmlns:a16="http://schemas.microsoft.com/office/drawing/2014/main" id="{4668B577-B2E1-4CC1-9647-1466BF95A4DD}"/>
               </a:ext>
             </a:extLst>
           </p:cNvPr>
@@ -13363,7 +13563,7 @@
           <p:cNvPr id="7" name="">
             <a:extLst xmlns:a="http://schemas.openxmlformats.org/drawingml/2006/main">
               <a:ext uri="{FF2B5EF4-FFF2-40B4-BE49-F238E27FC236}">
-                <a16:creationId xmlns:a16="http://schemas.microsoft.com/office/drawing/2014/main" id="{70A04ED2-CEF8-46BC-8F24-B00005DB05AA}"/>
+                <a16:creationId xmlns:a16="http://schemas.microsoft.com/office/drawing/2014/main" id="{4504F99D-DDE7-415C-B5F3-5C4162A53D02}"/>
               </a:ext>
             </a:extLst>
           </p:cNvPr>
@@ -13395,7 +13595,7 @@
           <p:cNvPr id="8" name="">
             <a:extLst xmlns:a="http://schemas.openxmlformats.org/drawingml/2006/main">
               <a:ext uri="{FF2B5EF4-FFF2-40B4-BE49-F238E27FC236}">
-                <a16:creationId xmlns:a16="http://schemas.microsoft.com/office/drawing/2014/main" id="{A5E50EE7-E2CB-4AEE-953C-071ADAC4A196}"/>
+                <a16:creationId xmlns:a16="http://schemas.microsoft.com/office/drawing/2014/main" id="{BFAB257D-07A9-410C-B9F6-C9A7FE2BA8AD}"/>
               </a:ext>
             </a:extLst>
           </p:cNvPr>
@@ -13452,7 +13652,7 @@
           <p:cNvPr id="9" name="">
             <a:extLst xmlns:a="http://schemas.openxmlformats.org/drawingml/2006/main">
               <a:ext uri="{FF2B5EF4-FFF2-40B4-BE49-F238E27FC236}">
-                <a16:creationId xmlns:a16="http://schemas.microsoft.com/office/drawing/2014/main" id="{6A4A0005-4DAD-4D96-BCB5-D67FBA41729B}"/>
+                <a16:creationId xmlns:a16="http://schemas.microsoft.com/office/drawing/2014/main" id="{9CA44DD6-90F8-4B2E-BC2B-2A617410D728}"/>
               </a:ext>
             </a:extLst>
           </p:cNvPr>
@@ -13509,7 +13709,7 @@
           <p:cNvPr id="10" name="">
             <a:extLst xmlns:a="http://schemas.openxmlformats.org/drawingml/2006/main">
               <a:ext uri="{FF2B5EF4-FFF2-40B4-BE49-F238E27FC236}">
-                <a16:creationId xmlns:a16="http://schemas.microsoft.com/office/drawing/2014/main" id="{D87AD061-AD09-45B3-9D1F-2541A9B63A09}"/>
+                <a16:creationId xmlns:a16="http://schemas.microsoft.com/office/drawing/2014/main" id="{A89039A3-DDA9-4BC4-BECB-957CAA73AA03}"/>
               </a:ext>
             </a:extLst>
           </p:cNvPr>
@@ -13543,7 +13743,7 @@
           <p:cNvPr id="11" name="">
             <a:extLst xmlns:a="http://schemas.openxmlformats.org/drawingml/2006/main">
               <a:ext uri="{FF2B5EF4-FFF2-40B4-BE49-F238E27FC236}">
-                <a16:creationId xmlns:a16="http://schemas.microsoft.com/office/drawing/2014/main" id="{46AB807B-5033-4B96-A964-29647F43F81A}"/>
+                <a16:creationId xmlns:a16="http://schemas.microsoft.com/office/drawing/2014/main" id="{21D59969-F127-4FF2-AF82-A719282EC551}"/>
               </a:ext>
             </a:extLst>
           </p:cNvPr>
@@ -13575,7 +13775,7 @@
           <p:cNvPr id="12" name="">
             <a:extLst xmlns:a="http://schemas.openxmlformats.org/drawingml/2006/main">
               <a:ext uri="{FF2B5EF4-FFF2-40B4-BE49-F238E27FC236}">
-                <a16:creationId xmlns:a16="http://schemas.microsoft.com/office/drawing/2014/main" id="{E4AA7B24-9F91-4A43-9E7E-1051711A5FDB}"/>
+                <a16:creationId xmlns:a16="http://schemas.microsoft.com/office/drawing/2014/main" id="{25860E75-7DB0-40F8-AF12-5AFE30A5B309}"/>
               </a:ext>
             </a:extLst>
           </p:cNvPr>
@@ -13632,7 +13832,7 @@
           <p:cNvPr id="13" name="">
             <a:extLst xmlns:a="http://schemas.openxmlformats.org/drawingml/2006/main">
               <a:ext uri="{FF2B5EF4-FFF2-40B4-BE49-F238E27FC236}">
-                <a16:creationId xmlns:a16="http://schemas.microsoft.com/office/drawing/2014/main" id="{F0664FD3-38A3-408C-B160-7B87BD9987C8}"/>
+                <a16:creationId xmlns:a16="http://schemas.microsoft.com/office/drawing/2014/main" id="{2E478EF0-EFF9-4782-B746-719191B61A80}"/>
               </a:ext>
             </a:extLst>
           </p:cNvPr>
@@ -13689,7 +13889,7 @@
           <p:cNvPr id="14" name="">
             <a:extLst xmlns:a="http://schemas.openxmlformats.org/drawingml/2006/main">
               <a:ext uri="{FF2B5EF4-FFF2-40B4-BE49-F238E27FC236}">
-                <a16:creationId xmlns:a16="http://schemas.microsoft.com/office/drawing/2014/main" id="{84782ABC-8E6E-4D35-8BB9-664CFF6EF1C0}"/>
+                <a16:creationId xmlns:a16="http://schemas.microsoft.com/office/drawing/2014/main" id="{9F86A006-4AD8-495C-A092-440B11E91490}"/>
               </a:ext>
             </a:extLst>
           </p:cNvPr>
@@ -13723,7 +13923,7 @@
           <p:cNvPr id="15" name="">
             <a:extLst xmlns:a="http://schemas.openxmlformats.org/drawingml/2006/main">
               <a:ext uri="{FF2B5EF4-FFF2-40B4-BE49-F238E27FC236}">
-                <a16:creationId xmlns:a16="http://schemas.microsoft.com/office/drawing/2014/main" id="{72B540EE-F16B-44B0-8BB7-81F5670F3CA1}"/>
+                <a16:creationId xmlns:a16="http://schemas.microsoft.com/office/drawing/2014/main" id="{50985DEF-378F-494A-8790-1E24C557B398}"/>
               </a:ext>
             </a:extLst>
           </p:cNvPr>
@@ -13755,7 +13955,7 @@
           <p:cNvPr id="16" name="">
             <a:extLst xmlns:a="http://schemas.openxmlformats.org/drawingml/2006/main">
               <a:ext uri="{FF2B5EF4-FFF2-40B4-BE49-F238E27FC236}">
-                <a16:creationId xmlns:a16="http://schemas.microsoft.com/office/drawing/2014/main" id="{6E2A446D-1506-4407-AF31-3754381C57A7}"/>
+                <a16:creationId xmlns:a16="http://schemas.microsoft.com/office/drawing/2014/main" id="{6720F932-0BFB-4DD7-818D-C044343AAA14}"/>
               </a:ext>
             </a:extLst>
           </p:cNvPr>
@@ -13812,7 +14012,7 @@
           <p:cNvPr id="17" name="">
             <a:extLst xmlns:a="http://schemas.openxmlformats.org/drawingml/2006/main">
               <a:ext uri="{FF2B5EF4-FFF2-40B4-BE49-F238E27FC236}">
-                <a16:creationId xmlns:a16="http://schemas.microsoft.com/office/drawing/2014/main" id="{5BF91F3B-9006-4F94-9455-52723793E817}"/>
+                <a16:creationId xmlns:a16="http://schemas.microsoft.com/office/drawing/2014/main" id="{457C0E90-83FB-4619-9DCD-30A52808D518}"/>
               </a:ext>
             </a:extLst>
           </p:cNvPr>
@@ -13869,7 +14069,7 @@
           <p:cNvPr id="18" name="">
             <a:extLst xmlns:a="http://schemas.openxmlformats.org/drawingml/2006/main">
               <a:ext uri="{FF2B5EF4-FFF2-40B4-BE49-F238E27FC236}">
-                <a16:creationId xmlns:a16="http://schemas.microsoft.com/office/drawing/2014/main" id="{921C5196-7550-4235-AC55-4860FC1A93D5}"/>
+                <a16:creationId xmlns:a16="http://schemas.microsoft.com/office/drawing/2014/main" id="{D17059C0-C6BE-4FA1-BA05-A0ECD973282B}"/>
               </a:ext>
             </a:extLst>
           </p:cNvPr>
@@ -13903,7 +14103,7 @@
           <p:cNvPr id="19" name="">
             <a:extLst xmlns:a="http://schemas.openxmlformats.org/drawingml/2006/main">
               <a:ext uri="{FF2B5EF4-FFF2-40B4-BE49-F238E27FC236}">
-                <a16:creationId xmlns:a16="http://schemas.microsoft.com/office/drawing/2014/main" id="{D0D9CDE0-2A67-42A8-9004-8008CCA73503}"/>
+                <a16:creationId xmlns:a16="http://schemas.microsoft.com/office/drawing/2014/main" id="{94DB529D-6ADB-4EB7-85D8-463A45C8DDD2}"/>
               </a:ext>
             </a:extLst>
           </p:cNvPr>
@@ -13935,7 +14135,7 @@
           <p:cNvPr id="20" name="">
             <a:extLst xmlns:a="http://schemas.openxmlformats.org/drawingml/2006/main">
               <a:ext uri="{FF2B5EF4-FFF2-40B4-BE49-F238E27FC236}">
-                <a16:creationId xmlns:a16="http://schemas.microsoft.com/office/drawing/2014/main" id="{9C3CB6D1-4A5C-486F-B919-E9C7B0E512DC}"/>
+                <a16:creationId xmlns:a16="http://schemas.microsoft.com/office/drawing/2014/main" id="{0A940CDF-8EF2-48CD-998A-14960B3CE01F}"/>
               </a:ext>
             </a:extLst>
           </p:cNvPr>
@@ -13992,7 +14192,7 @@
           <p:cNvPr id="21" name="">
             <a:extLst xmlns:a="http://schemas.openxmlformats.org/drawingml/2006/main">
               <a:ext uri="{FF2B5EF4-FFF2-40B4-BE49-F238E27FC236}">
-                <a16:creationId xmlns:a16="http://schemas.microsoft.com/office/drawing/2014/main" id="{D1514CF9-1BD5-49CE-9664-E59C4BFE6915}"/>
+                <a16:creationId xmlns:a16="http://schemas.microsoft.com/office/drawing/2014/main" id="{DA0318F4-44C3-498F-A098-083A5C646E92}"/>
               </a:ext>
             </a:extLst>
           </p:cNvPr>
@@ -14047,7 +14247,7 @@
     </p:spTree>
     <p:extLst>
       <p:ext uri="{BB962C8B-B14F-4D97-AF65-F5344CB8AC3E}">
-        <p14:creationId xmlns:p14="http://schemas.microsoft.com/office/powerpoint/2010/main" val="906978848"/>
+        <p14:creationId xmlns:p14="http://schemas.microsoft.com/office/powerpoint/2010/main" val="313119237"/>
       </p:ext>
     </p:extLst>
   </p:cSld>
